--- a/Documentos-R/TaskFlow_Apresentacao_Visual.pptx
+++ b/Documentos-R/TaskFlow_Apresentacao_Visual.pptx
@@ -5,19 +5,19 @@
     <p:sldMasterId id="2147483648" r:id="rId1"/>
   </p:sldMasterIdLst>
   <p:sldIdLst>
-    <p:sldId id="256" r:id="rId7"/>
-    <p:sldId id="257" r:id="rId8"/>
-    <p:sldId id="258" r:id="rId9"/>
-    <p:sldId id="259" r:id="rId10"/>
-    <p:sldId id="260" r:id="rId11"/>
-    <p:sldId id="261" r:id="rId12"/>
-    <p:sldId id="262" r:id="rId13"/>
-    <p:sldId id="263" r:id="rId14"/>
-    <p:sldId id="264" r:id="rId15"/>
-    <p:sldId id="265" r:id="rId16"/>
-    <p:sldId id="266" r:id="rId17"/>
+    <p:sldId id="256" r:id="rId2"/>
+    <p:sldId id="257" r:id="rId3"/>
+    <p:sldId id="258" r:id="rId4"/>
+    <p:sldId id="259" r:id="rId5"/>
+    <p:sldId id="260" r:id="rId6"/>
+    <p:sldId id="261" r:id="rId7"/>
+    <p:sldId id="262" r:id="rId8"/>
+    <p:sldId id="263" r:id="rId9"/>
+    <p:sldId id="264" r:id="rId10"/>
+    <p:sldId id="265" r:id="rId11"/>
+    <p:sldId id="266" r:id="rId12"/>
   </p:sldIdLst>
-  <p:sldSz cx="12191695" cy="6858000" type="screen4x3"/>
+  <p:sldSz cx="12192000" cy="6858000"/>
   <p:notesSz cx="6858000" cy="9144000"/>
   <p:defaultTextStyle>
     <a:defPPr>
@@ -114,6 +114,22 @@
       </a:defRPr>
     </a:lvl9pPr>
   </p:defaultTextStyle>
+  <p:extLst>
+    <p:ext uri="{EFAFB233-063F-42B5-8137-9DF3F51BA10A}">
+      <p15:sldGuideLst xmlns:p15="http://schemas.microsoft.com/office/powerpoint/2012/main">
+        <p15:guide id="1" orient="horz" pos="2160">
+          <p15:clr>
+            <a:srgbClr val="A4A3A4"/>
+          </p15:clr>
+        </p15:guide>
+        <p15:guide id="2" pos="2880">
+          <p15:clr>
+            <a:srgbClr val="A4A3A4"/>
+          </p15:clr>
+        </p15:guide>
+      </p15:sldGuideLst>
+    </p:ext>
+  </p:extLst>
 </p:presentation>
 </file>
 
@@ -155,10 +171,9 @@
           <a:lstStyle/>
           <a:p>
             <a:r>
-              <a:rPr lang="en-US" smtClean="0"/>
+              <a:rPr lang="en-US"/>
               <a:t>Click to edit Master title style</a:t>
             </a:r>
-            <a:endParaRPr lang="en-US"/>
           </a:p>
         </p:txBody>
       </p:sp>
@@ -274,10 +289,9 @@
           </a:lstStyle>
           <a:p>
             <a:r>
-              <a:rPr lang="en-US" smtClean="0"/>
+              <a:rPr lang="en-US"/>
               <a:t>Click to edit Master subtitle style</a:t>
             </a:r>
-            <a:endParaRPr lang="en-US"/>
           </a:p>
         </p:txBody>
       </p:sp>
@@ -298,7 +312,7 @@
           <a:p>
             <a:fld id="{5BCAD085-E8A6-8845-BD4E-CB4CCA059FC4}" type="datetimeFigureOut">
               <a:rPr lang="en-US" smtClean="0"/>
-              <a:t>1/27/13</a:t>
+              <a:t>10/22/2026</a:t>
             </a:fld>
             <a:endParaRPr lang="en-US"/>
           </a:p>
@@ -340,7 +354,7 @@
           <a:p>
             <a:fld id="{C1FF6DA9-008F-8B48-92A6-B652298478BF}" type="slidenum">
               <a:rPr lang="en-US" smtClean="0"/>
-              <a:t>‹#›</a:t>
+              <a:t>‹nº›</a:t>
             </a:fld>
             <a:endParaRPr lang="en-US"/>
           </a:p>
@@ -392,10 +406,9 @@
           <a:lstStyle/>
           <a:p>
             <a:r>
-              <a:rPr lang="en-US" smtClean="0"/>
+              <a:rPr lang="en-US"/>
               <a:t>Click to edit Master title style</a:t>
             </a:r>
-            <a:endParaRPr lang="en-US"/>
           </a:p>
         </p:txBody>
       </p:sp>
@@ -416,38 +429,37 @@
           <a:p>
             <a:pPr lvl="0"/>
             <a:r>
-              <a:rPr lang="en-US" smtClean="0"/>
+              <a:rPr lang="en-US"/>
               <a:t>Click to edit Master text styles</a:t>
             </a:r>
           </a:p>
           <a:p>
             <a:pPr lvl="1"/>
             <a:r>
-              <a:rPr lang="en-US" smtClean="0"/>
+              <a:rPr lang="en-US"/>
               <a:t>Second level</a:t>
             </a:r>
           </a:p>
           <a:p>
             <a:pPr lvl="2"/>
             <a:r>
-              <a:rPr lang="en-US" smtClean="0"/>
+              <a:rPr lang="en-US"/>
               <a:t>Third level</a:t>
             </a:r>
           </a:p>
           <a:p>
             <a:pPr lvl="3"/>
             <a:r>
-              <a:rPr lang="en-US" smtClean="0"/>
+              <a:rPr lang="en-US"/>
               <a:t>Fourth level</a:t>
             </a:r>
           </a:p>
           <a:p>
             <a:pPr lvl="4"/>
             <a:r>
-              <a:rPr lang="en-US" smtClean="0"/>
+              <a:rPr lang="en-US"/>
               <a:t>Fifth level</a:t>
             </a:r>
-            <a:endParaRPr lang="en-US"/>
           </a:p>
         </p:txBody>
       </p:sp>
@@ -468,7 +480,7 @@
           <a:p>
             <a:fld id="{5BCAD085-E8A6-8845-BD4E-CB4CCA059FC4}" type="datetimeFigureOut">
               <a:rPr lang="en-US" smtClean="0"/>
-              <a:t>1/27/13</a:t>
+              <a:t>10/22/2026</a:t>
             </a:fld>
             <a:endParaRPr lang="en-US"/>
           </a:p>
@@ -510,7 +522,7 @@
           <a:p>
             <a:fld id="{C1FF6DA9-008F-8B48-92A6-B652298478BF}" type="slidenum">
               <a:rPr lang="en-US" smtClean="0"/>
-              <a:t>‹#›</a:t>
+              <a:t>‹nº›</a:t>
             </a:fld>
             <a:endParaRPr lang="en-US"/>
           </a:p>
@@ -567,10 +579,9 @@
           <a:lstStyle/>
           <a:p>
             <a:r>
-              <a:rPr lang="en-US" smtClean="0"/>
+              <a:rPr lang="en-US"/>
               <a:t>Click to edit Master title style</a:t>
             </a:r>
-            <a:endParaRPr lang="en-US"/>
           </a:p>
         </p:txBody>
       </p:sp>
@@ -596,38 +607,37 @@
           <a:p>
             <a:pPr lvl="0"/>
             <a:r>
-              <a:rPr lang="en-US" smtClean="0"/>
+              <a:rPr lang="en-US"/>
               <a:t>Click to edit Master text styles</a:t>
             </a:r>
           </a:p>
           <a:p>
             <a:pPr lvl="1"/>
             <a:r>
-              <a:rPr lang="en-US" smtClean="0"/>
+              <a:rPr lang="en-US"/>
               <a:t>Second level</a:t>
             </a:r>
           </a:p>
           <a:p>
             <a:pPr lvl="2"/>
             <a:r>
-              <a:rPr lang="en-US" smtClean="0"/>
+              <a:rPr lang="en-US"/>
               <a:t>Third level</a:t>
             </a:r>
           </a:p>
           <a:p>
             <a:pPr lvl="3"/>
             <a:r>
-              <a:rPr lang="en-US" smtClean="0"/>
+              <a:rPr lang="en-US"/>
               <a:t>Fourth level</a:t>
             </a:r>
           </a:p>
           <a:p>
             <a:pPr lvl="4"/>
             <a:r>
-              <a:rPr lang="en-US" smtClean="0"/>
+              <a:rPr lang="en-US"/>
               <a:t>Fifth level</a:t>
             </a:r>
-            <a:endParaRPr lang="en-US"/>
           </a:p>
         </p:txBody>
       </p:sp>
@@ -648,7 +658,7 @@
           <a:p>
             <a:fld id="{5BCAD085-E8A6-8845-BD4E-CB4CCA059FC4}" type="datetimeFigureOut">
               <a:rPr lang="en-US" smtClean="0"/>
-              <a:t>1/27/13</a:t>
+              <a:t>10/22/2026</a:t>
             </a:fld>
             <a:endParaRPr lang="en-US"/>
           </a:p>
@@ -690,7 +700,7 @@
           <a:p>
             <a:fld id="{C1FF6DA9-008F-8B48-92A6-B652298478BF}" type="slidenum">
               <a:rPr lang="en-US" smtClean="0"/>
-              <a:t>‹#›</a:t>
+              <a:t>‹nº›</a:t>
             </a:fld>
             <a:endParaRPr lang="en-US"/>
           </a:p>
@@ -742,10 +752,9 @@
           <a:lstStyle/>
           <a:p>
             <a:r>
-              <a:rPr lang="en-US" smtClean="0"/>
+              <a:rPr lang="en-US"/>
               <a:t>Click to edit Master title style</a:t>
             </a:r>
-            <a:endParaRPr lang="en-US"/>
           </a:p>
         </p:txBody>
       </p:sp>
@@ -766,38 +775,37 @@
           <a:p>
             <a:pPr lvl="0"/>
             <a:r>
-              <a:rPr lang="en-US" smtClean="0"/>
+              <a:rPr lang="en-US"/>
               <a:t>Click to edit Master text styles</a:t>
             </a:r>
           </a:p>
           <a:p>
             <a:pPr lvl="1"/>
             <a:r>
-              <a:rPr lang="en-US" smtClean="0"/>
+              <a:rPr lang="en-US"/>
               <a:t>Second level</a:t>
             </a:r>
           </a:p>
           <a:p>
             <a:pPr lvl="2"/>
             <a:r>
-              <a:rPr lang="en-US" smtClean="0"/>
+              <a:rPr lang="en-US"/>
               <a:t>Third level</a:t>
             </a:r>
           </a:p>
           <a:p>
             <a:pPr lvl="3"/>
             <a:r>
-              <a:rPr lang="en-US" smtClean="0"/>
+              <a:rPr lang="en-US"/>
               <a:t>Fourth level</a:t>
             </a:r>
           </a:p>
           <a:p>
             <a:pPr lvl="4"/>
             <a:r>
-              <a:rPr lang="en-US" smtClean="0"/>
+              <a:rPr lang="en-US"/>
               <a:t>Fifth level</a:t>
             </a:r>
-            <a:endParaRPr lang="en-US"/>
           </a:p>
         </p:txBody>
       </p:sp>
@@ -818,7 +826,7 @@
           <a:p>
             <a:fld id="{5BCAD085-E8A6-8845-BD4E-CB4CCA059FC4}" type="datetimeFigureOut">
               <a:rPr lang="en-US" smtClean="0"/>
-              <a:t>1/27/13</a:t>
+              <a:t>10/22/2026</a:t>
             </a:fld>
             <a:endParaRPr lang="en-US"/>
           </a:p>
@@ -860,7 +868,7 @@
           <a:p>
             <a:fld id="{C1FF6DA9-008F-8B48-92A6-B652298478BF}" type="slidenum">
               <a:rPr lang="en-US" smtClean="0"/>
-              <a:t>‹#›</a:t>
+              <a:t>‹nº›</a:t>
             </a:fld>
             <a:endParaRPr lang="en-US"/>
           </a:p>
@@ -921,10 +929,9 @@
           </a:lstStyle>
           <a:p>
             <a:r>
-              <a:rPr lang="en-US" smtClean="0"/>
+              <a:rPr lang="en-US"/>
               <a:t>Click to edit Master title style</a:t>
             </a:r>
-            <a:endParaRPr lang="en-US"/>
           </a:p>
         </p:txBody>
       </p:sp>
@@ -1041,7 +1048,7 @@
           <a:p>
             <a:pPr lvl="0"/>
             <a:r>
-              <a:rPr lang="en-US" smtClean="0"/>
+              <a:rPr lang="en-US"/>
               <a:t>Click to edit Master text styles</a:t>
             </a:r>
           </a:p>
@@ -1064,7 +1071,7 @@
           <a:p>
             <a:fld id="{5BCAD085-E8A6-8845-BD4E-CB4CCA059FC4}" type="datetimeFigureOut">
               <a:rPr lang="en-US" smtClean="0"/>
-              <a:t>1/27/13</a:t>
+              <a:t>10/22/2026</a:t>
             </a:fld>
             <a:endParaRPr lang="en-US"/>
           </a:p>
@@ -1106,7 +1113,7 @@
           <a:p>
             <a:fld id="{C1FF6DA9-008F-8B48-92A6-B652298478BF}" type="slidenum">
               <a:rPr lang="en-US" smtClean="0"/>
-              <a:t>‹#›</a:t>
+              <a:t>‹nº›</a:t>
             </a:fld>
             <a:endParaRPr lang="en-US"/>
           </a:p>
@@ -1158,10 +1165,9 @@
           <a:lstStyle/>
           <a:p>
             <a:r>
-              <a:rPr lang="en-US" smtClean="0"/>
+              <a:rPr lang="en-US"/>
               <a:t>Click to edit Master title style</a:t>
             </a:r>
-            <a:endParaRPr lang="en-US"/>
           </a:p>
         </p:txBody>
       </p:sp>
@@ -1215,38 +1221,37 @@
           <a:p>
             <a:pPr lvl="0"/>
             <a:r>
-              <a:rPr lang="en-US" smtClean="0"/>
+              <a:rPr lang="en-US"/>
               <a:t>Click to edit Master text styles</a:t>
             </a:r>
           </a:p>
           <a:p>
             <a:pPr lvl="1"/>
             <a:r>
-              <a:rPr lang="en-US" smtClean="0"/>
+              <a:rPr lang="en-US"/>
               <a:t>Second level</a:t>
             </a:r>
           </a:p>
           <a:p>
             <a:pPr lvl="2"/>
             <a:r>
-              <a:rPr lang="en-US" smtClean="0"/>
+              <a:rPr lang="en-US"/>
               <a:t>Third level</a:t>
             </a:r>
           </a:p>
           <a:p>
             <a:pPr lvl="3"/>
             <a:r>
-              <a:rPr lang="en-US" smtClean="0"/>
+              <a:rPr lang="en-US"/>
               <a:t>Fourth level</a:t>
             </a:r>
           </a:p>
           <a:p>
             <a:pPr lvl="4"/>
             <a:r>
-              <a:rPr lang="en-US" smtClean="0"/>
+              <a:rPr lang="en-US"/>
               <a:t>Fifth level</a:t>
             </a:r>
-            <a:endParaRPr lang="en-US"/>
           </a:p>
         </p:txBody>
       </p:sp>
@@ -1300,38 +1305,37 @@
           <a:p>
             <a:pPr lvl="0"/>
             <a:r>
-              <a:rPr lang="en-US" smtClean="0"/>
+              <a:rPr lang="en-US"/>
               <a:t>Click to edit Master text styles</a:t>
             </a:r>
           </a:p>
           <a:p>
             <a:pPr lvl="1"/>
             <a:r>
-              <a:rPr lang="en-US" smtClean="0"/>
+              <a:rPr lang="en-US"/>
               <a:t>Second level</a:t>
             </a:r>
           </a:p>
           <a:p>
             <a:pPr lvl="2"/>
             <a:r>
-              <a:rPr lang="en-US" smtClean="0"/>
+              <a:rPr lang="en-US"/>
               <a:t>Third level</a:t>
             </a:r>
           </a:p>
           <a:p>
             <a:pPr lvl="3"/>
             <a:r>
-              <a:rPr lang="en-US" smtClean="0"/>
+              <a:rPr lang="en-US"/>
               <a:t>Fourth level</a:t>
             </a:r>
           </a:p>
           <a:p>
             <a:pPr lvl="4"/>
             <a:r>
-              <a:rPr lang="en-US" smtClean="0"/>
+              <a:rPr lang="en-US"/>
               <a:t>Fifth level</a:t>
             </a:r>
-            <a:endParaRPr lang="en-US"/>
           </a:p>
         </p:txBody>
       </p:sp>
@@ -1352,7 +1356,7 @@
           <a:p>
             <a:fld id="{5BCAD085-E8A6-8845-BD4E-CB4CCA059FC4}" type="datetimeFigureOut">
               <a:rPr lang="en-US" smtClean="0"/>
-              <a:t>1/27/13</a:t>
+              <a:t>10/22/2026</a:t>
             </a:fld>
             <a:endParaRPr lang="en-US"/>
           </a:p>
@@ -1394,7 +1398,7 @@
           <a:p>
             <a:fld id="{C1FF6DA9-008F-8B48-92A6-B652298478BF}" type="slidenum">
               <a:rPr lang="en-US" smtClean="0"/>
-              <a:t>‹#›</a:t>
+              <a:t>‹nº›</a:t>
             </a:fld>
             <a:endParaRPr lang="en-US"/>
           </a:p>
@@ -1450,10 +1454,9 @@
           </a:lstStyle>
           <a:p>
             <a:r>
-              <a:rPr lang="en-US" smtClean="0"/>
+              <a:rPr lang="en-US"/>
               <a:t>Click to edit Master title style</a:t>
             </a:r>
-            <a:endParaRPr lang="en-US"/>
           </a:p>
         </p:txBody>
       </p:sp>
@@ -1516,7 +1519,7 @@
           <a:p>
             <a:pPr lvl="0"/>
             <a:r>
-              <a:rPr lang="en-US" smtClean="0"/>
+              <a:rPr lang="en-US"/>
               <a:t>Click to edit Master text styles</a:t>
             </a:r>
           </a:p>
@@ -1572,38 +1575,37 @@
           <a:p>
             <a:pPr lvl="0"/>
             <a:r>
-              <a:rPr lang="en-US" smtClean="0"/>
+              <a:rPr lang="en-US"/>
               <a:t>Click to edit Master text styles</a:t>
             </a:r>
           </a:p>
           <a:p>
             <a:pPr lvl="1"/>
             <a:r>
-              <a:rPr lang="en-US" smtClean="0"/>
+              <a:rPr lang="en-US"/>
               <a:t>Second level</a:t>
             </a:r>
           </a:p>
           <a:p>
             <a:pPr lvl="2"/>
             <a:r>
-              <a:rPr lang="en-US" smtClean="0"/>
+              <a:rPr lang="en-US"/>
               <a:t>Third level</a:t>
             </a:r>
           </a:p>
           <a:p>
             <a:pPr lvl="3"/>
             <a:r>
-              <a:rPr lang="en-US" smtClean="0"/>
+              <a:rPr lang="en-US"/>
               <a:t>Fourth level</a:t>
             </a:r>
           </a:p>
           <a:p>
             <a:pPr lvl="4"/>
             <a:r>
-              <a:rPr lang="en-US" smtClean="0"/>
+              <a:rPr lang="en-US"/>
               <a:t>Fifth level</a:t>
             </a:r>
-            <a:endParaRPr lang="en-US"/>
           </a:p>
         </p:txBody>
       </p:sp>
@@ -1666,7 +1668,7 @@
           <a:p>
             <a:pPr lvl="0"/>
             <a:r>
-              <a:rPr lang="en-US" smtClean="0"/>
+              <a:rPr lang="en-US"/>
               <a:t>Click to edit Master text styles</a:t>
             </a:r>
           </a:p>
@@ -1722,38 +1724,37 @@
           <a:p>
             <a:pPr lvl="0"/>
             <a:r>
-              <a:rPr lang="en-US" smtClean="0"/>
+              <a:rPr lang="en-US"/>
               <a:t>Click to edit Master text styles</a:t>
             </a:r>
           </a:p>
           <a:p>
             <a:pPr lvl="1"/>
             <a:r>
-              <a:rPr lang="en-US" smtClean="0"/>
+              <a:rPr lang="en-US"/>
               <a:t>Second level</a:t>
             </a:r>
           </a:p>
           <a:p>
             <a:pPr lvl="2"/>
             <a:r>
-              <a:rPr lang="en-US" smtClean="0"/>
+              <a:rPr lang="en-US"/>
               <a:t>Third level</a:t>
             </a:r>
           </a:p>
           <a:p>
             <a:pPr lvl="3"/>
             <a:r>
-              <a:rPr lang="en-US" smtClean="0"/>
+              <a:rPr lang="en-US"/>
               <a:t>Fourth level</a:t>
             </a:r>
           </a:p>
           <a:p>
             <a:pPr lvl="4"/>
             <a:r>
-              <a:rPr lang="en-US" smtClean="0"/>
+              <a:rPr lang="en-US"/>
               <a:t>Fifth level</a:t>
             </a:r>
-            <a:endParaRPr lang="en-US"/>
           </a:p>
         </p:txBody>
       </p:sp>
@@ -1774,7 +1775,7 @@
           <a:p>
             <a:fld id="{5BCAD085-E8A6-8845-BD4E-CB4CCA059FC4}" type="datetimeFigureOut">
               <a:rPr lang="en-US" smtClean="0"/>
-              <a:t>1/27/13</a:t>
+              <a:t>10/22/2026</a:t>
             </a:fld>
             <a:endParaRPr lang="en-US"/>
           </a:p>
@@ -1816,7 +1817,7 @@
           <a:p>
             <a:fld id="{C1FF6DA9-008F-8B48-92A6-B652298478BF}" type="slidenum">
               <a:rPr lang="en-US" smtClean="0"/>
-              <a:t>‹#›</a:t>
+              <a:t>‹nº›</a:t>
             </a:fld>
             <a:endParaRPr lang="en-US"/>
           </a:p>
@@ -1868,10 +1869,9 @@
           <a:lstStyle/>
           <a:p>
             <a:r>
-              <a:rPr lang="en-US" smtClean="0"/>
+              <a:rPr lang="en-US"/>
               <a:t>Click to edit Master title style</a:t>
             </a:r>
-            <a:endParaRPr lang="en-US"/>
           </a:p>
         </p:txBody>
       </p:sp>
@@ -1892,7 +1892,7 @@
           <a:p>
             <a:fld id="{5BCAD085-E8A6-8845-BD4E-CB4CCA059FC4}" type="datetimeFigureOut">
               <a:rPr lang="en-US" smtClean="0"/>
-              <a:t>1/27/13</a:t>
+              <a:t>10/22/2026</a:t>
             </a:fld>
             <a:endParaRPr lang="en-US"/>
           </a:p>
@@ -1934,7 +1934,7 @@
           <a:p>
             <a:fld id="{C1FF6DA9-008F-8B48-92A6-B652298478BF}" type="slidenum">
               <a:rPr lang="en-US" smtClean="0"/>
-              <a:t>‹#›</a:t>
+              <a:t>‹nº›</a:t>
             </a:fld>
             <a:endParaRPr lang="en-US"/>
           </a:p>
@@ -1987,7 +1987,7 @@
           <a:p>
             <a:fld id="{5BCAD085-E8A6-8845-BD4E-CB4CCA059FC4}" type="datetimeFigureOut">
               <a:rPr lang="en-US" smtClean="0"/>
-              <a:t>1/27/13</a:t>
+              <a:t>10/22/2026</a:t>
             </a:fld>
             <a:endParaRPr lang="en-US"/>
           </a:p>
@@ -2029,7 +2029,7 @@
           <a:p>
             <a:fld id="{C1FF6DA9-008F-8B48-92A6-B652298478BF}" type="slidenum">
               <a:rPr lang="en-US" smtClean="0"/>
-              <a:t>‹#›</a:t>
+              <a:t>‹nº›</a:t>
             </a:fld>
             <a:endParaRPr lang="en-US"/>
           </a:p>
@@ -2090,10 +2090,9 @@
           </a:lstStyle>
           <a:p>
             <a:r>
-              <a:rPr lang="en-US" smtClean="0"/>
+              <a:rPr lang="en-US"/>
               <a:t>Click to edit Master title style</a:t>
             </a:r>
-            <a:endParaRPr lang="en-US"/>
           </a:p>
         </p:txBody>
       </p:sp>
@@ -2147,38 +2146,37 @@
           <a:p>
             <a:pPr lvl="0"/>
             <a:r>
-              <a:rPr lang="en-US" smtClean="0"/>
+              <a:rPr lang="en-US"/>
               <a:t>Click to edit Master text styles</a:t>
             </a:r>
           </a:p>
           <a:p>
             <a:pPr lvl="1"/>
             <a:r>
-              <a:rPr lang="en-US" smtClean="0"/>
+              <a:rPr lang="en-US"/>
               <a:t>Second level</a:t>
             </a:r>
           </a:p>
           <a:p>
             <a:pPr lvl="2"/>
             <a:r>
-              <a:rPr lang="en-US" smtClean="0"/>
+              <a:rPr lang="en-US"/>
               <a:t>Third level</a:t>
             </a:r>
           </a:p>
           <a:p>
             <a:pPr lvl="3"/>
             <a:r>
-              <a:rPr lang="en-US" smtClean="0"/>
+              <a:rPr lang="en-US"/>
               <a:t>Fourth level</a:t>
             </a:r>
           </a:p>
           <a:p>
             <a:pPr lvl="4"/>
             <a:r>
-              <a:rPr lang="en-US" smtClean="0"/>
+              <a:rPr lang="en-US"/>
               <a:t>Fifth level</a:t>
             </a:r>
-            <a:endParaRPr lang="en-US"/>
           </a:p>
         </p:txBody>
       </p:sp>
@@ -2241,7 +2239,7 @@
           <a:p>
             <a:pPr lvl="0"/>
             <a:r>
-              <a:rPr lang="en-US" smtClean="0"/>
+              <a:rPr lang="en-US"/>
               <a:t>Click to edit Master text styles</a:t>
             </a:r>
           </a:p>
@@ -2264,7 +2262,7 @@
           <a:p>
             <a:fld id="{5BCAD085-E8A6-8845-BD4E-CB4CCA059FC4}" type="datetimeFigureOut">
               <a:rPr lang="en-US" smtClean="0"/>
-              <a:t>1/27/13</a:t>
+              <a:t>10/22/2026</a:t>
             </a:fld>
             <a:endParaRPr lang="en-US"/>
           </a:p>
@@ -2306,7 +2304,7 @@
           <a:p>
             <a:fld id="{C1FF6DA9-008F-8B48-92A6-B652298478BF}" type="slidenum">
               <a:rPr lang="en-US" smtClean="0"/>
-              <a:t>‹#›</a:t>
+              <a:t>‹nº›</a:t>
             </a:fld>
             <a:endParaRPr lang="en-US"/>
           </a:p>
@@ -2367,10 +2365,9 @@
           </a:lstStyle>
           <a:p>
             <a:r>
-              <a:rPr lang="en-US" smtClean="0"/>
+              <a:rPr lang="en-US"/>
               <a:t>Click to edit Master title style</a:t>
             </a:r>
-            <a:endParaRPr lang="en-US"/>
           </a:p>
         </p:txBody>
       </p:sp>
@@ -2494,7 +2491,7 @@
           <a:p>
             <a:pPr lvl="0"/>
             <a:r>
-              <a:rPr lang="en-US" smtClean="0"/>
+              <a:rPr lang="en-US"/>
               <a:t>Click to edit Master text styles</a:t>
             </a:r>
           </a:p>
@@ -2517,7 +2514,7 @@
           <a:p>
             <a:fld id="{5BCAD085-E8A6-8845-BD4E-CB4CCA059FC4}" type="datetimeFigureOut">
               <a:rPr lang="en-US" smtClean="0"/>
-              <a:t>1/27/13</a:t>
+              <a:t>10/22/2026</a:t>
             </a:fld>
             <a:endParaRPr lang="en-US"/>
           </a:p>
@@ -2559,7 +2556,7 @@
           <a:p>
             <a:fld id="{C1FF6DA9-008F-8B48-92A6-B652298478BF}" type="slidenum">
               <a:rPr lang="en-US" smtClean="0"/>
-              <a:t>‹#›</a:t>
+              <a:t>‹nº›</a:t>
             </a:fld>
             <a:endParaRPr lang="en-US"/>
           </a:p>
@@ -2626,10 +2623,9 @@
           <a:lstStyle/>
           <a:p>
             <a:r>
-              <a:rPr lang="en-US" smtClean="0"/>
+              <a:rPr lang="en-US"/>
               <a:t>Click to edit Master title style</a:t>
             </a:r>
-            <a:endParaRPr lang="en-US"/>
           </a:p>
         </p:txBody>
       </p:sp>
@@ -2660,38 +2656,37 @@
           <a:p>
             <a:pPr lvl="0"/>
             <a:r>
-              <a:rPr lang="en-US" smtClean="0"/>
+              <a:rPr lang="en-US"/>
               <a:t>Click to edit Master text styles</a:t>
             </a:r>
           </a:p>
           <a:p>
             <a:pPr lvl="1"/>
             <a:r>
-              <a:rPr lang="en-US" smtClean="0"/>
+              <a:rPr lang="en-US"/>
               <a:t>Second level</a:t>
             </a:r>
           </a:p>
           <a:p>
             <a:pPr lvl="2"/>
             <a:r>
-              <a:rPr lang="en-US" smtClean="0"/>
+              <a:rPr lang="en-US"/>
               <a:t>Third level</a:t>
             </a:r>
           </a:p>
           <a:p>
             <a:pPr lvl="3"/>
             <a:r>
-              <a:rPr lang="en-US" smtClean="0"/>
+              <a:rPr lang="en-US"/>
               <a:t>Fourth level</a:t>
             </a:r>
           </a:p>
           <a:p>
             <a:pPr lvl="4"/>
             <a:r>
-              <a:rPr lang="en-US" smtClean="0"/>
+              <a:rPr lang="en-US"/>
               <a:t>Fifth level</a:t>
             </a:r>
-            <a:endParaRPr lang="en-US"/>
           </a:p>
         </p:txBody>
       </p:sp>
@@ -2730,7 +2725,7 @@
           <a:p>
             <a:fld id="{5BCAD085-E8A6-8845-BD4E-CB4CCA059FC4}" type="datetimeFigureOut">
               <a:rPr lang="en-US" smtClean="0"/>
-              <a:t>1/27/13</a:t>
+              <a:t>10/22/2026</a:t>
             </a:fld>
             <a:endParaRPr lang="en-US"/>
           </a:p>
@@ -2808,7 +2803,7 @@
           <a:p>
             <a:fld id="{C1FF6DA9-008F-8B48-92A6-B652298478BF}" type="slidenum">
               <a:rPr lang="en-US" smtClean="0"/>
-              <a:t>‹#›</a:t>
+              <a:t>‹nº›</a:t>
             </a:fld>
             <a:endParaRPr lang="en-US"/>
           </a:p>
@@ -3089,7 +3084,7 @@
 </file>
 
 <file path=ppt/slides/slide1.xml><?xml version="1.0" encoding="utf-8"?>
-<p:sld xmlns:a="http://schemas.openxmlformats.org/drawingml/2006/main" xmlns:p="http://schemas.openxmlformats.org/presentationml/2006/main" xmlns:r="http://schemas.openxmlformats.org/officeDocument/2006/relationships">
+<p:sld xmlns:a="http://schemas.openxmlformats.org/drawingml/2006/main" xmlns:r="http://schemas.openxmlformats.org/officeDocument/2006/relationships" xmlns:p="http://schemas.openxmlformats.org/presentationml/2006/main">
   <p:cSld>
     <p:bg>
       <p:bgPr>
@@ -3105,7 +3100,14 @@
         <p:cNvGrpSpPr/>
         <p:nvPr/>
       </p:nvGrpSpPr>
-      <p:grpSpPr/>
+      <p:grpSpPr>
+        <a:xfrm>
+          <a:off x="0" y="0"/>
+          <a:ext cx="0" cy="0"/>
+          <a:chOff x="0" y="0"/>
+          <a:chExt cx="0" cy="0"/>
+        </a:xfrm>
+      </p:grpSpPr>
       <p:sp>
         <p:nvSpPr>
           <p:cNvPr id="2" name="Oval 1"/>
@@ -3146,6 +3148,7 @@
           <a:lstStyle/>
           <a:p>
             <a:pPr algn="ctr"/>
+            <a:endParaRPr/>
           </a:p>
         </p:txBody>
       </p:sp>
@@ -3189,6 +3192,7 @@
           <a:lstStyle/>
           <a:p>
             <a:pPr algn="ctr"/>
+            <a:endParaRPr/>
           </a:p>
         </p:txBody>
       </p:sp>
@@ -3232,6 +3236,7 @@
           <a:lstStyle/>
           <a:p>
             <a:pPr algn="ctr"/>
+            <a:endParaRPr/>
           </a:p>
         </p:txBody>
       </p:sp>
@@ -3275,6 +3280,7 @@
           <a:lstStyle/>
           <a:p>
             <a:pPr algn="ctr"/>
+            <a:endParaRPr/>
           </a:p>
         </p:txBody>
       </p:sp>
@@ -3295,7 +3301,7 @@
           <a:noFill/>
         </p:spPr>
         <p:txBody>
-          <a:bodyPr wrap="square" lIns="36576" rIns="36576" tIns="36576" bIns="36576" anchor="t">
+          <a:bodyPr wrap="square" lIns="36576" tIns="36576" rIns="36576" bIns="36576" anchor="t">
             <a:spAutoFit/>
           </a:bodyPr>
           <a:lstStyle/>
@@ -3306,7 +3312,7 @@
               </a:spcAft>
             </a:pPr>
             <a:r>
-              <a:rPr sz="1200" b="1">
+              <a:rPr sz="1200" b="1" dirty="0">
                 <a:solidFill>
                   <a:srgbClr val="24D5D2"/>
                 </a:solidFill>
@@ -3334,7 +3340,7 @@
           <a:noFill/>
         </p:spPr>
         <p:txBody>
-          <a:bodyPr wrap="square" lIns="36576" rIns="36576" tIns="36576" bIns="36576" anchor="t">
+          <a:bodyPr wrap="square" lIns="36576" tIns="36576" rIns="36576" bIns="36576" anchor="t">
             <a:spAutoFit/>
           </a:bodyPr>
           <a:lstStyle/>
@@ -3373,7 +3379,7 @@
           <a:noFill/>
         </p:spPr>
         <p:txBody>
-          <a:bodyPr wrap="square" lIns="36576" rIns="36576" tIns="36576" bIns="36576" anchor="t">
+          <a:bodyPr wrap="square" lIns="36576" tIns="36576" rIns="36576" bIns="36576" anchor="t">
             <a:spAutoFit/>
           </a:bodyPr>
           <a:lstStyle/>
@@ -3384,13 +3390,58 @@
               </a:spcAft>
             </a:pPr>
             <a:r>
-              <a:rPr sz="2500" b="0">
+              <a:rPr sz="2500" b="0" dirty="0" err="1">
                 <a:solidFill>
                   <a:srgbClr val="ABBAD3"/>
                 </a:solidFill>
                 <a:latin typeface="Aptos Display"/>
               </a:rPr>
-              <a:t>Organizar. Colaborar. Concluir.</a:t>
+              <a:t>Organizar</a:t>
+            </a:r>
+            <a:r>
+              <a:rPr sz="2500" b="0" dirty="0">
+                <a:solidFill>
+                  <a:srgbClr val="ABBAD3"/>
+                </a:solidFill>
+                <a:latin typeface="Aptos Display"/>
+              </a:rPr>
+              <a:t>. </a:t>
+            </a:r>
+            <a:r>
+              <a:rPr sz="2500" b="0" dirty="0" err="1">
+                <a:solidFill>
+                  <a:srgbClr val="ABBAD3"/>
+                </a:solidFill>
+                <a:latin typeface="Aptos Display"/>
+              </a:rPr>
+              <a:t>Colaborar</a:t>
+            </a:r>
+            <a:r>
+              <a:rPr sz="2500" b="0" dirty="0">
+                <a:solidFill>
+                  <a:srgbClr val="ABBAD3"/>
+                </a:solidFill>
+                <a:latin typeface="Aptos Display"/>
+              </a:rPr>
+              <a:t>. </a:t>
+            </a:r>
+            <a:r>
+              <a:rPr sz="2500" b="0" dirty="0" err="1">
+                <a:solidFill>
+                  <a:srgbClr val="ABBAD3"/>
+                </a:solidFill>
+                <a:latin typeface="Aptos Display"/>
+              </a:rPr>
+              <a:t>Concluir</a:t>
+            </a:r>
+            <a:r>
+              <a:rPr sz="2500" b="0" dirty="0">
+                <a:solidFill>
+                  <a:srgbClr val="ABBAD3"/>
+                </a:solidFill>
+                <a:latin typeface="Aptos Display"/>
+              </a:rPr>
+              <a:t>.</a:t>
             </a:r>
           </a:p>
         </p:txBody>
@@ -3435,6 +3486,7 @@
           <a:lstStyle/>
           <a:p>
             <a:pPr algn="ctr"/>
+            <a:endParaRPr/>
           </a:p>
         </p:txBody>
       </p:sp>
@@ -3455,7 +3507,7 @@
           <a:noFill/>
         </p:spPr>
         <p:txBody>
-          <a:bodyPr wrap="square" lIns="36576" rIns="36576" tIns="36576" bIns="36576" anchor="t">
+          <a:bodyPr wrap="square" lIns="36576" tIns="36576" rIns="36576" bIns="36576" anchor="t">
             <a:spAutoFit/>
           </a:bodyPr>
           <a:lstStyle/>
@@ -3486,7 +3538,7 @@
         <p:spPr>
           <a:xfrm>
             <a:off x="841248" y="5989320"/>
-            <a:ext cx="9144000" cy="320040"/>
+            <a:ext cx="9144000" cy="258532"/>
           </a:xfrm>
           <a:prstGeom prst="rect">
             <a:avLst/>
@@ -3494,7 +3546,7 @@
           <a:noFill/>
         </p:spPr>
         <p:txBody>
-          <a:bodyPr wrap="square" lIns="36576" rIns="36576" tIns="36576" bIns="36576" anchor="t">
+          <a:bodyPr wrap="square" lIns="36576" tIns="36576" rIns="36576" bIns="36576" anchor="t">
             <a:spAutoFit/>
           </a:bodyPr>
           <a:lstStyle/>
@@ -3505,13 +3557,49 @@
               </a:spcAft>
             </a:pPr>
             <a:r>
-              <a:rPr sz="1200" b="0">
+              <a:rPr lang="pt-PT" sz="1200" b="0" dirty="0">
                 <a:solidFill>
                   <a:srgbClr val="ABBAD3"/>
                 </a:solidFill>
                 <a:latin typeface="Aptos"/>
               </a:rPr>
-              <a:t>[Nome do aluno / equipa]  •  [Curso / instituição]  •  2026</a:t>
+              <a:t>Ramalho Fernando </a:t>
+            </a:r>
+            <a:r>
+              <a:rPr lang="pt-PT" sz="1200" b="0" dirty="0" err="1">
+                <a:solidFill>
+                  <a:srgbClr val="ABBAD3"/>
+                </a:solidFill>
+                <a:latin typeface="Aptos"/>
+              </a:rPr>
+              <a:t>Ié</a:t>
+            </a:r>
+            <a:r>
+              <a:rPr sz="1200" b="0" dirty="0">
+                <a:solidFill>
+                  <a:srgbClr val="ABBAD3"/>
+                </a:solidFill>
+                <a:latin typeface="Aptos"/>
+              </a:rPr>
+              <a:t> • </a:t>
+            </a:r>
+            <a:r>
+              <a:rPr lang="pt-PT" sz="1200" dirty="0">
+                <a:solidFill>
+                  <a:srgbClr val="ABBAD3"/>
+                </a:solidFill>
+                <a:latin typeface="Aptos"/>
+              </a:rPr>
+              <a:t>Desenvolvimento de software</a:t>
+            </a:r>
+            <a:r>
+              <a:rPr sz="1200" b="0" dirty="0">
+                <a:solidFill>
+                  <a:srgbClr val="ABBAD3"/>
+                </a:solidFill>
+                <a:latin typeface="Aptos"/>
+              </a:rPr>
+              <a:t>  •  2026</a:t>
             </a:r>
           </a:p>
         </p:txBody>
@@ -3556,6 +3644,7 @@
           <a:lstStyle/>
           <a:p>
             <a:pPr algn="ctr"/>
+            <a:endParaRPr/>
           </a:p>
         </p:txBody>
       </p:sp>
@@ -3599,6 +3688,7 @@
           <a:lstStyle/>
           <a:p>
             <a:pPr algn="ctr"/>
+            <a:endParaRPr/>
           </a:p>
         </p:txBody>
       </p:sp>
@@ -3642,6 +3732,7 @@
           <a:lstStyle/>
           <a:p>
             <a:pPr algn="ctr"/>
+            <a:endParaRPr/>
           </a:p>
         </p:txBody>
       </p:sp>
@@ -3685,6 +3776,7 @@
           <a:lstStyle/>
           <a:p>
             <a:pPr algn="ctr"/>
+            <a:endParaRPr/>
           </a:p>
         </p:txBody>
       </p:sp>
@@ -3728,6 +3820,7 @@
           <a:lstStyle/>
           <a:p>
             <a:pPr algn="ctr"/>
+            <a:endParaRPr/>
           </a:p>
         </p:txBody>
       </p:sp>
@@ -3771,6 +3864,7 @@
           <a:lstStyle/>
           <a:p>
             <a:pPr algn="ctr"/>
+            <a:endParaRPr/>
           </a:p>
         </p:txBody>
       </p:sp>
@@ -3814,6 +3908,7 @@
           <a:lstStyle/>
           <a:p>
             <a:pPr algn="ctr"/>
+            <a:endParaRPr/>
           </a:p>
         </p:txBody>
       </p:sp>
@@ -3857,6 +3952,7 @@
           <a:lstStyle/>
           <a:p>
             <a:pPr algn="ctr"/>
+            <a:endParaRPr/>
           </a:p>
         </p:txBody>
       </p:sp>
@@ -3900,6 +3996,7 @@
           <a:lstStyle/>
           <a:p>
             <a:pPr algn="ctr"/>
+            <a:endParaRPr/>
           </a:p>
         </p:txBody>
       </p:sp>
@@ -3943,6 +4040,7 @@
           <a:lstStyle/>
           <a:p>
             <a:pPr algn="ctr"/>
+            <a:endParaRPr/>
           </a:p>
         </p:txBody>
       </p:sp>
@@ -3986,6 +4084,7 @@
           <a:lstStyle/>
           <a:p>
             <a:pPr algn="ctr"/>
+            <a:endParaRPr/>
           </a:p>
         </p:txBody>
       </p:sp>
@@ -4029,6 +4128,7 @@
           <a:lstStyle/>
           <a:p>
             <a:pPr algn="ctr"/>
+            <a:endParaRPr/>
           </a:p>
         </p:txBody>
       </p:sp>
@@ -4072,6 +4172,7 @@
           <a:lstStyle/>
           <a:p>
             <a:pPr algn="ctr"/>
+            <a:endParaRPr/>
           </a:p>
         </p:txBody>
       </p:sp>
@@ -4115,6 +4216,7 @@
           <a:lstStyle/>
           <a:p>
             <a:pPr algn="ctr"/>
+            <a:endParaRPr/>
           </a:p>
         </p:txBody>
       </p:sp>
@@ -4158,6 +4260,7 @@
           <a:lstStyle/>
           <a:p>
             <a:pPr algn="ctr"/>
+            <a:endParaRPr/>
           </a:p>
         </p:txBody>
       </p:sp>
@@ -4201,6 +4304,7 @@
           <a:lstStyle/>
           <a:p>
             <a:pPr algn="ctr"/>
+            <a:endParaRPr/>
           </a:p>
         </p:txBody>
       </p:sp>
@@ -4244,6 +4348,7 @@
           <a:lstStyle/>
           <a:p>
             <a:pPr algn="ctr"/>
+            <a:endParaRPr/>
           </a:p>
         </p:txBody>
       </p:sp>
@@ -4287,6 +4392,7 @@
           <a:lstStyle/>
           <a:p>
             <a:pPr algn="ctr"/>
+            <a:endParaRPr/>
           </a:p>
         </p:txBody>
       </p:sp>
@@ -4330,6 +4436,7 @@
           <a:lstStyle/>
           <a:p>
             <a:pPr algn="ctr"/>
+            <a:endParaRPr/>
           </a:p>
         </p:txBody>
       </p:sp>
@@ -4373,6 +4480,7 @@
           <a:lstStyle/>
           <a:p>
             <a:pPr algn="ctr"/>
+            <a:endParaRPr/>
           </a:p>
         </p:txBody>
       </p:sp>
@@ -4416,6 +4524,7 @@
           <a:lstStyle/>
           <a:p>
             <a:pPr algn="ctr"/>
+            <a:endParaRPr/>
           </a:p>
         </p:txBody>
       </p:sp>
@@ -4459,6 +4568,7 @@
           <a:lstStyle/>
           <a:p>
             <a:pPr algn="ctr"/>
+            <a:endParaRPr/>
           </a:p>
         </p:txBody>
       </p:sp>
@@ -4502,6 +4612,7 @@
           <a:lstStyle/>
           <a:p>
             <a:pPr algn="ctr"/>
+            <a:endParaRPr/>
           </a:p>
         </p:txBody>
       </p:sp>
@@ -4545,6 +4656,7 @@
           <a:lstStyle/>
           <a:p>
             <a:pPr algn="ctr"/>
+            <a:endParaRPr/>
           </a:p>
         </p:txBody>
       </p:sp>
@@ -4588,6 +4700,7 @@
           <a:lstStyle/>
           <a:p>
             <a:pPr algn="ctr"/>
+            <a:endParaRPr/>
           </a:p>
         </p:txBody>
       </p:sp>
@@ -4631,6 +4744,7 @@
           <a:lstStyle/>
           <a:p>
             <a:pPr algn="ctr"/>
+            <a:endParaRPr/>
           </a:p>
         </p:txBody>
       </p:sp>
@@ -4674,6 +4788,7 @@
           <a:lstStyle/>
           <a:p>
             <a:pPr algn="ctr"/>
+            <a:endParaRPr/>
           </a:p>
         </p:txBody>
       </p:sp>
@@ -4717,6 +4832,7 @@
           <a:lstStyle/>
           <a:p>
             <a:pPr algn="ctr"/>
+            <a:endParaRPr/>
           </a:p>
         </p:txBody>
       </p:sp>
@@ -4760,6 +4876,7 @@
           <a:lstStyle/>
           <a:p>
             <a:pPr algn="ctr"/>
+            <a:endParaRPr/>
           </a:p>
         </p:txBody>
       </p:sp>
@@ -4803,6 +4920,7 @@
           <a:lstStyle/>
           <a:p>
             <a:pPr algn="ctr"/>
+            <a:endParaRPr/>
           </a:p>
         </p:txBody>
       </p:sp>
@@ -4846,6 +4964,7 @@
           <a:lstStyle/>
           <a:p>
             <a:pPr algn="ctr"/>
+            <a:endParaRPr/>
           </a:p>
         </p:txBody>
       </p:sp>
@@ -4889,6 +5008,7 @@
           <a:lstStyle/>
           <a:p>
             <a:pPr algn="ctr"/>
+            <a:endParaRPr/>
           </a:p>
         </p:txBody>
       </p:sp>
@@ -4901,7 +5021,7 @@
 </file>
 
 <file path=ppt/slides/slide10.xml><?xml version="1.0" encoding="utf-8"?>
-<p:sld xmlns:a="http://schemas.openxmlformats.org/drawingml/2006/main" xmlns:p="http://schemas.openxmlformats.org/presentationml/2006/main" xmlns:r="http://schemas.openxmlformats.org/officeDocument/2006/relationships">
+<p:sld xmlns:a="http://schemas.openxmlformats.org/drawingml/2006/main" xmlns:r="http://schemas.openxmlformats.org/officeDocument/2006/relationships" xmlns:p="http://schemas.openxmlformats.org/presentationml/2006/main">
   <p:cSld>
     <p:bg>
       <p:bgPr>
@@ -4917,7 +5037,14 @@
         <p:cNvGrpSpPr/>
         <p:nvPr/>
       </p:nvGrpSpPr>
-      <p:grpSpPr/>
+      <p:grpSpPr>
+        <a:xfrm>
+          <a:off x="0" y="0"/>
+          <a:ext cx="0" cy="0"/>
+          <a:chOff x="0" y="0"/>
+          <a:chExt cx="0" cy="0"/>
+        </a:xfrm>
+      </p:grpSpPr>
       <p:sp>
         <p:nvSpPr>
           <p:cNvPr id="2" name="TextBox 1"/>
@@ -4935,7 +5062,7 @@
           <a:noFill/>
         </p:spPr>
         <p:txBody>
-          <a:bodyPr wrap="square" lIns="36576" rIns="36576" tIns="36576" bIns="36576" anchor="t">
+          <a:bodyPr wrap="square" lIns="36576" tIns="36576" rIns="36576" bIns="36576" anchor="t">
             <a:spAutoFit/>
           </a:bodyPr>
           <a:lstStyle/>
@@ -4974,7 +5101,7 @@
           <a:noFill/>
         </p:spPr>
         <p:txBody>
-          <a:bodyPr wrap="square" lIns="36576" rIns="36576" tIns="36576" bIns="36576" anchor="t">
+          <a:bodyPr wrap="square" lIns="36576" tIns="36576" rIns="36576" bIns="36576" anchor="t">
             <a:spAutoFit/>
           </a:bodyPr>
           <a:lstStyle/>
@@ -5036,6 +5163,7 @@
           <a:lstStyle/>
           <a:p>
             <a:pPr algn="ctr"/>
+            <a:endParaRPr/>
           </a:p>
         </p:txBody>
       </p:sp>
@@ -5056,7 +5184,7 @@
           <a:noFill/>
         </p:spPr>
         <p:txBody>
-          <a:bodyPr wrap="square" lIns="36576" rIns="36576" tIns="36576" bIns="36576" anchor="t">
+          <a:bodyPr wrap="square" lIns="36576" tIns="36576" rIns="36576" bIns="36576" anchor="t">
             <a:spAutoFit/>
           </a:bodyPr>
           <a:lstStyle/>
@@ -5095,7 +5223,7 @@
           <a:noFill/>
         </p:spPr>
         <p:txBody>
-          <a:bodyPr wrap="square" lIns="36576" rIns="36576" tIns="36576" bIns="36576" anchor="t">
+          <a:bodyPr wrap="square" lIns="36576" tIns="36576" rIns="36576" bIns="36576" anchor="t">
             <a:spAutoFit/>
           </a:bodyPr>
           <a:lstStyle/>
@@ -5157,6 +5285,7 @@
           <a:lstStyle/>
           <a:p>
             <a:pPr algn="ctr"/>
+            <a:endParaRPr/>
           </a:p>
         </p:txBody>
       </p:sp>
@@ -5200,6 +5329,7 @@
           <a:lstStyle/>
           <a:p>
             <a:pPr algn="ctr"/>
+            <a:endParaRPr/>
           </a:p>
         </p:txBody>
       </p:sp>
@@ -5220,7 +5350,7 @@
           <a:noFill/>
         </p:spPr>
         <p:txBody>
-          <a:bodyPr wrap="square" lIns="36576" rIns="36576" tIns="36576" bIns="36576" anchor="t">
+          <a:bodyPr wrap="square" lIns="36576" tIns="36576" rIns="36576" bIns="36576" anchor="t">
             <a:spAutoFit/>
           </a:bodyPr>
           <a:lstStyle/>
@@ -5259,7 +5389,7 @@
           <a:noFill/>
         </p:spPr>
         <p:txBody>
-          <a:bodyPr wrap="square" lIns="36576" rIns="36576" tIns="36576" bIns="36576" anchor="t">
+          <a:bodyPr wrap="square" lIns="36576" tIns="36576" rIns="36576" bIns="36576" anchor="t">
             <a:spAutoFit/>
           </a:bodyPr>
           <a:lstStyle/>
@@ -5321,6 +5451,7 @@
           <a:lstStyle/>
           <a:p>
             <a:pPr algn="ctr"/>
+            <a:endParaRPr/>
           </a:p>
         </p:txBody>
       </p:sp>
@@ -5364,6 +5495,7 @@
           <a:lstStyle/>
           <a:p>
             <a:pPr algn="ctr"/>
+            <a:endParaRPr/>
           </a:p>
         </p:txBody>
       </p:sp>
@@ -5384,7 +5516,7 @@
           <a:noFill/>
         </p:spPr>
         <p:txBody>
-          <a:bodyPr wrap="square" lIns="36576" rIns="36576" tIns="36576" bIns="36576" anchor="t">
+          <a:bodyPr wrap="square" lIns="36576" tIns="36576" rIns="36576" bIns="36576" anchor="t">
             <a:spAutoFit/>
           </a:bodyPr>
           <a:lstStyle/>
@@ -5423,7 +5555,7 @@
           <a:noFill/>
         </p:spPr>
         <p:txBody>
-          <a:bodyPr wrap="square" lIns="36576" rIns="36576" tIns="36576" bIns="36576" anchor="t">
+          <a:bodyPr wrap="square" lIns="36576" tIns="36576" rIns="36576" bIns="36576" anchor="t">
             <a:spAutoFit/>
           </a:bodyPr>
           <a:lstStyle/>
@@ -5485,6 +5617,7 @@
           <a:lstStyle/>
           <a:p>
             <a:pPr algn="ctr"/>
+            <a:endParaRPr/>
           </a:p>
         </p:txBody>
       </p:sp>
@@ -5528,6 +5661,7 @@
           <a:lstStyle/>
           <a:p>
             <a:pPr algn="ctr"/>
+            <a:endParaRPr/>
           </a:p>
         </p:txBody>
       </p:sp>
@@ -5548,7 +5682,7 @@
           <a:noFill/>
         </p:spPr>
         <p:txBody>
-          <a:bodyPr wrap="square" lIns="36576" rIns="36576" tIns="36576" bIns="36576" anchor="t">
+          <a:bodyPr wrap="square" lIns="36576" tIns="36576" rIns="36576" bIns="36576" anchor="t">
             <a:spAutoFit/>
           </a:bodyPr>
           <a:lstStyle/>
@@ -5587,7 +5721,7 @@
           <a:noFill/>
         </p:spPr>
         <p:txBody>
-          <a:bodyPr wrap="square" lIns="36576" rIns="36576" tIns="36576" bIns="36576" anchor="t">
+          <a:bodyPr wrap="square" lIns="36576" tIns="36576" rIns="36576" bIns="36576" anchor="t">
             <a:spAutoFit/>
           </a:bodyPr>
           <a:lstStyle/>
@@ -5649,6 +5783,7 @@
           <a:lstStyle/>
           <a:p>
             <a:pPr algn="ctr"/>
+            <a:endParaRPr/>
           </a:p>
         </p:txBody>
       </p:sp>
@@ -5692,6 +5827,7 @@
           <a:lstStyle/>
           <a:p>
             <a:pPr algn="ctr"/>
+            <a:endParaRPr/>
           </a:p>
         </p:txBody>
       </p:sp>
@@ -5712,7 +5848,7 @@
           <a:noFill/>
         </p:spPr>
         <p:txBody>
-          <a:bodyPr wrap="square" lIns="36576" rIns="36576" tIns="36576" bIns="36576" anchor="t">
+          <a:bodyPr wrap="square" lIns="36576" tIns="36576" rIns="36576" bIns="36576" anchor="t">
             <a:spAutoFit/>
           </a:bodyPr>
           <a:lstStyle/>
@@ -5751,7 +5887,7 @@
           <a:noFill/>
         </p:spPr>
         <p:txBody>
-          <a:bodyPr wrap="square" lIns="36576" rIns="36576" tIns="36576" bIns="36576" anchor="t">
+          <a:bodyPr wrap="square" lIns="36576" tIns="36576" rIns="36576" bIns="36576" anchor="t">
             <a:spAutoFit/>
           </a:bodyPr>
           <a:lstStyle/>
@@ -5790,7 +5926,7 @@
           <a:noFill/>
         </p:spPr>
         <p:txBody>
-          <a:bodyPr wrap="square" lIns="36576" rIns="36576" tIns="36576" bIns="36576" anchor="t">
+          <a:bodyPr wrap="square" lIns="36576" tIns="36576" rIns="36576" bIns="36576" anchor="t">
             <a:spAutoFit/>
           </a:bodyPr>
           <a:lstStyle/>
@@ -5821,7 +5957,7 @@
 </file>
 
 <file path=ppt/slides/slide11.xml><?xml version="1.0" encoding="utf-8"?>
-<p:sld xmlns:a="http://schemas.openxmlformats.org/drawingml/2006/main" xmlns:p="http://schemas.openxmlformats.org/presentationml/2006/main" xmlns:r="http://schemas.openxmlformats.org/officeDocument/2006/relationships">
+<p:sld xmlns:a="http://schemas.openxmlformats.org/drawingml/2006/main" xmlns:r="http://schemas.openxmlformats.org/officeDocument/2006/relationships" xmlns:p="http://schemas.openxmlformats.org/presentationml/2006/main">
   <p:cSld>
     <p:bg>
       <p:bgPr>
@@ -5837,7 +5973,14 @@
         <p:cNvGrpSpPr/>
         <p:nvPr/>
       </p:nvGrpSpPr>
-      <p:grpSpPr/>
+      <p:grpSpPr>
+        <a:xfrm>
+          <a:off x="0" y="0"/>
+          <a:ext cx="0" cy="0"/>
+          <a:chOff x="0" y="0"/>
+          <a:chExt cx="0" cy="0"/>
+        </a:xfrm>
+      </p:grpSpPr>
       <p:sp>
         <p:nvSpPr>
           <p:cNvPr id="2" name="Oval 1"/>
@@ -5878,6 +6021,7 @@
           <a:lstStyle/>
           <a:p>
             <a:pPr algn="ctr"/>
+            <a:endParaRPr/>
           </a:p>
         </p:txBody>
       </p:sp>
@@ -5921,6 +6065,7 @@
           <a:lstStyle/>
           <a:p>
             <a:pPr algn="ctr"/>
+            <a:endParaRPr/>
           </a:p>
         </p:txBody>
       </p:sp>
@@ -5964,6 +6109,7 @@
           <a:lstStyle/>
           <a:p>
             <a:pPr algn="ctr"/>
+            <a:endParaRPr/>
           </a:p>
         </p:txBody>
       </p:sp>
@@ -5984,7 +6130,7 @@
           <a:noFill/>
         </p:spPr>
         <p:txBody>
-          <a:bodyPr wrap="square" lIns="36576" rIns="36576" tIns="36576" bIns="36576" anchor="t">
+          <a:bodyPr wrap="square" lIns="36576" tIns="36576" rIns="36576" bIns="36576" anchor="t">
             <a:spAutoFit/>
           </a:bodyPr>
           <a:lstStyle/>
@@ -6023,7 +6169,7 @@
           <a:noFill/>
         </p:spPr>
         <p:txBody>
-          <a:bodyPr wrap="square" lIns="36576" rIns="36576" tIns="36576" bIns="36576" anchor="t">
+          <a:bodyPr wrap="square" lIns="36576" tIns="36576" rIns="36576" bIns="36576" anchor="t">
             <a:spAutoFit/>
           </a:bodyPr>
           <a:lstStyle/>
@@ -6094,7 +6240,7 @@
           <a:noFill/>
         </p:spPr>
         <p:txBody>
-          <a:bodyPr wrap="square" lIns="36576" rIns="36576" tIns="36576" bIns="36576" anchor="t">
+          <a:bodyPr wrap="square" lIns="36576" tIns="36576" rIns="36576" bIns="36576" anchor="t">
             <a:spAutoFit/>
           </a:bodyPr>
           <a:lstStyle/>
@@ -6133,7 +6279,7 @@
           <a:noFill/>
         </p:spPr>
         <p:txBody>
-          <a:bodyPr wrap="square" lIns="36576" rIns="36576" tIns="36576" bIns="36576" anchor="t">
+          <a:bodyPr wrap="square" lIns="36576" tIns="36576" rIns="36576" bIns="36576" anchor="t">
             <a:spAutoFit/>
           </a:bodyPr>
           <a:lstStyle/>
@@ -6164,7 +6310,7 @@
 </file>
 
 <file path=ppt/slides/slide2.xml><?xml version="1.0" encoding="utf-8"?>
-<p:sld xmlns:a="http://schemas.openxmlformats.org/drawingml/2006/main" xmlns:p="http://schemas.openxmlformats.org/presentationml/2006/main" xmlns:r="http://schemas.openxmlformats.org/officeDocument/2006/relationships">
+<p:sld xmlns:a="http://schemas.openxmlformats.org/drawingml/2006/main" xmlns:r="http://schemas.openxmlformats.org/officeDocument/2006/relationships" xmlns:p="http://schemas.openxmlformats.org/presentationml/2006/main">
   <p:cSld>
     <p:bg>
       <p:bgPr>
@@ -6180,7 +6326,14 @@
         <p:cNvGrpSpPr/>
         <p:nvPr/>
       </p:nvGrpSpPr>
-      <p:grpSpPr/>
+      <p:grpSpPr>
+        <a:xfrm>
+          <a:off x="0" y="0"/>
+          <a:ext cx="0" cy="0"/>
+          <a:chOff x="0" y="0"/>
+          <a:chExt cx="0" cy="0"/>
+        </a:xfrm>
+      </p:grpSpPr>
       <p:sp>
         <p:nvSpPr>
           <p:cNvPr id="2" name="TextBox 1"/>
@@ -6198,7 +6351,7 @@
           <a:noFill/>
         </p:spPr>
         <p:txBody>
-          <a:bodyPr wrap="square" lIns="36576" rIns="36576" tIns="36576" bIns="36576" anchor="t">
+          <a:bodyPr wrap="square" lIns="36576" tIns="36576" rIns="36576" bIns="36576" anchor="t">
             <a:spAutoFit/>
           </a:bodyPr>
           <a:lstStyle/>
@@ -6237,7 +6390,7 @@
           <a:noFill/>
         </p:spPr>
         <p:txBody>
-          <a:bodyPr wrap="square" lIns="36576" rIns="36576" tIns="36576" bIns="36576" anchor="t">
+          <a:bodyPr wrap="square" lIns="36576" tIns="36576" rIns="36576" bIns="36576" anchor="t">
             <a:spAutoFit/>
           </a:bodyPr>
           <a:lstStyle/>
@@ -6299,6 +6452,7 @@
           <a:lstStyle/>
           <a:p>
             <a:pPr algn="ctr"/>
+            <a:endParaRPr/>
           </a:p>
         </p:txBody>
       </p:sp>
@@ -6319,7 +6473,7 @@
           <a:noFill/>
         </p:spPr>
         <p:txBody>
-          <a:bodyPr wrap="square" lIns="36576" rIns="36576" tIns="36576" bIns="36576" anchor="t">
+          <a:bodyPr wrap="square" lIns="36576" tIns="36576" rIns="36576" bIns="36576" anchor="t">
             <a:spAutoFit/>
           </a:bodyPr>
           <a:lstStyle/>
@@ -6358,7 +6512,7 @@
           <a:noFill/>
         </p:spPr>
         <p:txBody>
-          <a:bodyPr wrap="square" lIns="36576" rIns="36576" tIns="36576" bIns="36576" anchor="t">
+          <a:bodyPr wrap="square" lIns="36576" tIns="36576" rIns="36576" bIns="36576" anchor="t">
             <a:spAutoFit/>
           </a:bodyPr>
           <a:lstStyle/>
@@ -6420,6 +6574,7 @@
           <a:lstStyle/>
           <a:p>
             <a:pPr algn="ctr"/>
+            <a:endParaRPr/>
           </a:p>
         </p:txBody>
       </p:sp>
@@ -6463,6 +6618,7 @@
           <a:lstStyle/>
           <a:p>
             <a:pPr algn="ctr"/>
+            <a:endParaRPr/>
           </a:p>
         </p:txBody>
       </p:sp>
@@ -6483,7 +6639,7 @@
           <a:noFill/>
         </p:spPr>
         <p:txBody>
-          <a:bodyPr wrap="square" lIns="36576" rIns="36576" tIns="36576" bIns="36576" anchor="t">
+          <a:bodyPr wrap="square" lIns="36576" tIns="36576" rIns="36576" bIns="36576" anchor="t">
             <a:spAutoFit/>
           </a:bodyPr>
           <a:lstStyle/>
@@ -6522,7 +6678,7 @@
           <a:noFill/>
         </p:spPr>
         <p:txBody>
-          <a:bodyPr wrap="square" lIns="36576" rIns="36576" tIns="36576" bIns="36576" anchor="t">
+          <a:bodyPr wrap="square" lIns="36576" tIns="36576" rIns="36576" bIns="36576" anchor="t">
             <a:spAutoFit/>
           </a:bodyPr>
           <a:lstStyle/>
@@ -6584,6 +6740,7 @@
           <a:lstStyle/>
           <a:p>
             <a:pPr algn="ctr"/>
+            <a:endParaRPr/>
           </a:p>
         </p:txBody>
       </p:sp>
@@ -6627,6 +6784,7 @@
           <a:lstStyle/>
           <a:p>
             <a:pPr algn="ctr"/>
+            <a:endParaRPr/>
           </a:p>
         </p:txBody>
       </p:sp>
@@ -6647,7 +6805,7 @@
           <a:noFill/>
         </p:spPr>
         <p:txBody>
-          <a:bodyPr wrap="square" lIns="36576" rIns="36576" tIns="36576" bIns="36576" anchor="t">
+          <a:bodyPr wrap="square" lIns="36576" tIns="36576" rIns="36576" bIns="36576" anchor="t">
             <a:spAutoFit/>
           </a:bodyPr>
           <a:lstStyle/>
@@ -6686,7 +6844,7 @@
           <a:noFill/>
         </p:spPr>
         <p:txBody>
-          <a:bodyPr wrap="square" lIns="36576" rIns="36576" tIns="36576" bIns="36576" anchor="t">
+          <a:bodyPr wrap="square" lIns="36576" tIns="36576" rIns="36576" bIns="36576" anchor="t">
             <a:spAutoFit/>
           </a:bodyPr>
           <a:lstStyle/>
@@ -6748,6 +6906,7 @@
           <a:lstStyle/>
           <a:p>
             <a:pPr algn="ctr"/>
+            <a:endParaRPr/>
           </a:p>
         </p:txBody>
       </p:sp>
@@ -6791,6 +6950,7 @@
           <a:lstStyle/>
           <a:p>
             <a:pPr algn="ctr"/>
+            <a:endParaRPr/>
           </a:p>
         </p:txBody>
       </p:sp>
@@ -6811,7 +6971,7 @@
           <a:noFill/>
         </p:spPr>
         <p:txBody>
-          <a:bodyPr wrap="square" lIns="36576" rIns="36576" tIns="36576" bIns="36576" anchor="t">
+          <a:bodyPr wrap="square" lIns="36576" tIns="36576" rIns="36576" bIns="36576" anchor="t">
             <a:spAutoFit/>
           </a:bodyPr>
           <a:lstStyle/>
@@ -6850,7 +7010,7 @@
           <a:noFill/>
         </p:spPr>
         <p:txBody>
-          <a:bodyPr wrap="square" lIns="36576" rIns="36576" tIns="36576" bIns="36576" anchor="t">
+          <a:bodyPr wrap="square" lIns="36576" tIns="36576" rIns="36576" bIns="36576" anchor="t">
             <a:spAutoFit/>
           </a:bodyPr>
           <a:lstStyle/>
@@ -6889,7 +7049,7 @@
           <a:noFill/>
         </p:spPr>
         <p:txBody>
-          <a:bodyPr wrap="square" lIns="36576" rIns="36576" tIns="36576" bIns="36576" anchor="t">
+          <a:bodyPr wrap="square" lIns="36576" tIns="36576" rIns="36576" bIns="36576" anchor="t">
             <a:spAutoFit/>
           </a:bodyPr>
           <a:lstStyle/>
@@ -6900,7 +7060,7 @@
               </a:spcAft>
             </a:pPr>
             <a:r>
-              <a:rPr sz="1000" b="1">
+              <a:rPr sz="1000" b="1" dirty="0">
                 <a:solidFill>
                   <a:srgbClr val="24D5D2"/>
                 </a:solidFill>
@@ -6928,7 +7088,7 @@
           <a:noFill/>
         </p:spPr>
         <p:txBody>
-          <a:bodyPr wrap="square" lIns="36576" rIns="36576" tIns="36576" bIns="36576" anchor="t">
+          <a:bodyPr wrap="square" lIns="36576" tIns="36576" rIns="36576" bIns="36576" anchor="t">
             <a:spAutoFit/>
           </a:bodyPr>
           <a:lstStyle/>
@@ -6959,7 +7119,7 @@
 </file>
 
 <file path=ppt/slides/slide3.xml><?xml version="1.0" encoding="utf-8"?>
-<p:sld xmlns:a="http://schemas.openxmlformats.org/drawingml/2006/main" xmlns:p="http://schemas.openxmlformats.org/presentationml/2006/main" xmlns:r="http://schemas.openxmlformats.org/officeDocument/2006/relationships">
+<p:sld xmlns:a="http://schemas.openxmlformats.org/drawingml/2006/main" xmlns:r="http://schemas.openxmlformats.org/officeDocument/2006/relationships" xmlns:p="http://schemas.openxmlformats.org/presentationml/2006/main">
   <p:cSld>
     <p:bg>
       <p:bgPr>
@@ -6975,7 +7135,14 @@
         <p:cNvGrpSpPr/>
         <p:nvPr/>
       </p:nvGrpSpPr>
-      <p:grpSpPr/>
+      <p:grpSpPr>
+        <a:xfrm>
+          <a:off x="0" y="0"/>
+          <a:ext cx="0" cy="0"/>
+          <a:chOff x="0" y="0"/>
+          <a:chExt cx="0" cy="0"/>
+        </a:xfrm>
+      </p:grpSpPr>
       <p:sp>
         <p:nvSpPr>
           <p:cNvPr id="2" name="TextBox 1"/>
@@ -6993,7 +7160,7 @@
           <a:noFill/>
         </p:spPr>
         <p:txBody>
-          <a:bodyPr wrap="square" lIns="36576" rIns="36576" tIns="36576" bIns="36576" anchor="t">
+          <a:bodyPr wrap="square" lIns="36576" tIns="36576" rIns="36576" bIns="36576" anchor="t">
             <a:spAutoFit/>
           </a:bodyPr>
           <a:lstStyle/>
@@ -7032,7 +7199,7 @@
           <a:noFill/>
         </p:spPr>
         <p:txBody>
-          <a:bodyPr wrap="square" lIns="36576" rIns="36576" tIns="36576" bIns="36576" anchor="t">
+          <a:bodyPr wrap="square" lIns="36576" tIns="36576" rIns="36576" bIns="36576" anchor="t">
             <a:spAutoFit/>
           </a:bodyPr>
           <a:lstStyle/>
@@ -7094,6 +7261,7 @@
           <a:lstStyle/>
           <a:p>
             <a:pPr algn="ctr"/>
+            <a:endParaRPr/>
           </a:p>
         </p:txBody>
       </p:sp>
@@ -7114,7 +7282,7 @@
           <a:noFill/>
         </p:spPr>
         <p:txBody>
-          <a:bodyPr wrap="square" lIns="36576" rIns="36576" tIns="36576" bIns="36576" anchor="t">
+          <a:bodyPr wrap="square" lIns="36576" tIns="36576" rIns="36576" bIns="36576" anchor="t">
             <a:spAutoFit/>
           </a:bodyPr>
           <a:lstStyle/>
@@ -7153,7 +7321,7 @@
           <a:noFill/>
         </p:spPr>
         <p:txBody>
-          <a:bodyPr wrap="square" lIns="36576" rIns="36576" tIns="36576" bIns="36576" anchor="t">
+          <a:bodyPr wrap="square" lIns="36576" tIns="36576" rIns="36576" bIns="36576" anchor="t">
             <a:spAutoFit/>
           </a:bodyPr>
           <a:lstStyle/>
@@ -7215,6 +7383,7 @@
           <a:lstStyle/>
           <a:p>
             <a:pPr algn="ctr"/>
+            <a:endParaRPr/>
           </a:p>
         </p:txBody>
       </p:sp>
@@ -7235,7 +7404,7 @@
           <a:noFill/>
         </p:spPr>
         <p:txBody>
-          <a:bodyPr wrap="square" lIns="36576" rIns="36576" tIns="36576" bIns="36576" anchor="t">
+          <a:bodyPr wrap="square" lIns="36576" tIns="36576" rIns="36576" bIns="36576" anchor="t">
             <a:spAutoFit/>
           </a:bodyPr>
           <a:lstStyle/>
@@ -7274,7 +7443,7 @@
           <a:noFill/>
         </p:spPr>
         <p:txBody>
-          <a:bodyPr wrap="square" lIns="36576" rIns="36576" tIns="36576" bIns="36576" anchor="t">
+          <a:bodyPr wrap="square" lIns="36576" tIns="36576" rIns="36576" bIns="36576" anchor="t">
             <a:spAutoFit/>
           </a:bodyPr>
           <a:lstStyle/>
@@ -7368,6 +7537,7 @@
           <a:lstStyle/>
           <a:p>
             <a:pPr algn="ctr"/>
+            <a:endParaRPr/>
           </a:p>
         </p:txBody>
       </p:sp>
@@ -7411,6 +7581,7 @@
           <a:lstStyle/>
           <a:p>
             <a:pPr algn="ctr"/>
+            <a:endParaRPr/>
           </a:p>
         </p:txBody>
       </p:sp>
@@ -7431,7 +7602,7 @@
           <a:noFill/>
         </p:spPr>
         <p:txBody>
-          <a:bodyPr wrap="square" lIns="36576" rIns="36576" tIns="36576" bIns="36576" anchor="t">
+          <a:bodyPr wrap="square" lIns="36576" tIns="36576" rIns="36576" bIns="36576" anchor="t">
             <a:spAutoFit/>
           </a:bodyPr>
           <a:lstStyle/>
@@ -7470,7 +7641,7 @@
           <a:noFill/>
         </p:spPr>
         <p:txBody>
-          <a:bodyPr wrap="square" lIns="36576" rIns="36576" tIns="36576" bIns="36576" anchor="t">
+          <a:bodyPr wrap="square" lIns="36576" tIns="36576" rIns="36576" bIns="36576" anchor="t">
             <a:spAutoFit/>
           </a:bodyPr>
           <a:lstStyle/>
@@ -7532,6 +7703,7 @@
           <a:lstStyle/>
           <a:p>
             <a:pPr algn="ctr"/>
+            <a:endParaRPr/>
           </a:p>
         </p:txBody>
       </p:sp>
@@ -7575,6 +7747,7 @@
           <a:lstStyle/>
           <a:p>
             <a:pPr algn="ctr"/>
+            <a:endParaRPr/>
           </a:p>
         </p:txBody>
       </p:sp>
@@ -7595,7 +7768,7 @@
           <a:noFill/>
         </p:spPr>
         <p:txBody>
-          <a:bodyPr wrap="square" lIns="36576" rIns="36576" tIns="36576" bIns="36576" anchor="t">
+          <a:bodyPr wrap="square" lIns="36576" tIns="36576" rIns="36576" bIns="36576" anchor="t">
             <a:spAutoFit/>
           </a:bodyPr>
           <a:lstStyle/>
@@ -7634,7 +7807,7 @@
           <a:noFill/>
         </p:spPr>
         <p:txBody>
-          <a:bodyPr wrap="square" lIns="36576" rIns="36576" tIns="36576" bIns="36576" anchor="t">
+          <a:bodyPr wrap="square" lIns="36576" tIns="36576" rIns="36576" bIns="36576" anchor="t">
             <a:spAutoFit/>
           </a:bodyPr>
           <a:lstStyle/>
@@ -7696,6 +7869,7 @@
           <a:lstStyle/>
           <a:p>
             <a:pPr algn="ctr"/>
+            <a:endParaRPr/>
           </a:p>
         </p:txBody>
       </p:sp>
@@ -7739,6 +7913,7 @@
           <a:lstStyle/>
           <a:p>
             <a:pPr algn="ctr"/>
+            <a:endParaRPr/>
           </a:p>
         </p:txBody>
       </p:sp>
@@ -7759,7 +7934,7 @@
           <a:noFill/>
         </p:spPr>
         <p:txBody>
-          <a:bodyPr wrap="square" lIns="36576" rIns="36576" tIns="36576" bIns="36576" anchor="t">
+          <a:bodyPr wrap="square" lIns="36576" tIns="36576" rIns="36576" bIns="36576" anchor="t">
             <a:spAutoFit/>
           </a:bodyPr>
           <a:lstStyle/>
@@ -7790,7 +7965,7 @@
 </file>
 
 <file path=ppt/slides/slide4.xml><?xml version="1.0" encoding="utf-8"?>
-<p:sld xmlns:a="http://schemas.openxmlformats.org/drawingml/2006/main" xmlns:p="http://schemas.openxmlformats.org/presentationml/2006/main" xmlns:r="http://schemas.openxmlformats.org/officeDocument/2006/relationships">
+<p:sld xmlns:a="http://schemas.openxmlformats.org/drawingml/2006/main" xmlns:r="http://schemas.openxmlformats.org/officeDocument/2006/relationships" xmlns:p="http://schemas.openxmlformats.org/presentationml/2006/main">
   <p:cSld>
     <p:bg>
       <p:bgPr>
@@ -7806,7 +7981,14 @@
         <p:cNvGrpSpPr/>
         <p:nvPr/>
       </p:nvGrpSpPr>
-      <p:grpSpPr/>
+      <p:grpSpPr>
+        <a:xfrm>
+          <a:off x="0" y="0"/>
+          <a:ext cx="0" cy="0"/>
+          <a:chOff x="0" y="0"/>
+          <a:chExt cx="0" cy="0"/>
+        </a:xfrm>
+      </p:grpSpPr>
       <p:sp>
         <p:nvSpPr>
           <p:cNvPr id="2" name="TextBox 1"/>
@@ -7824,7 +8006,7 @@
           <a:noFill/>
         </p:spPr>
         <p:txBody>
-          <a:bodyPr wrap="square" lIns="36576" rIns="36576" tIns="36576" bIns="36576" anchor="t">
+          <a:bodyPr wrap="square" lIns="36576" tIns="36576" rIns="36576" bIns="36576" anchor="t">
             <a:spAutoFit/>
           </a:bodyPr>
           <a:lstStyle/>
@@ -7863,7 +8045,7 @@
           <a:noFill/>
         </p:spPr>
         <p:txBody>
-          <a:bodyPr wrap="square" lIns="36576" rIns="36576" tIns="36576" bIns="36576" anchor="t">
+          <a:bodyPr wrap="square" lIns="36576" tIns="36576" rIns="36576" bIns="36576" anchor="t">
             <a:spAutoFit/>
           </a:bodyPr>
           <a:lstStyle/>
@@ -7925,6 +8107,7 @@
           <a:lstStyle/>
           <a:p>
             <a:pPr algn="ctr"/>
+            <a:endParaRPr/>
           </a:p>
         </p:txBody>
       </p:sp>
@@ -7945,7 +8128,7 @@
           <a:noFill/>
         </p:spPr>
         <p:txBody>
-          <a:bodyPr wrap="square" lIns="36576" rIns="36576" tIns="36576" bIns="36576" anchor="t">
+          <a:bodyPr wrap="square" lIns="36576" tIns="36576" rIns="36576" bIns="36576" anchor="t">
             <a:spAutoFit/>
           </a:bodyPr>
           <a:lstStyle/>
@@ -7984,7 +8167,7 @@
           <a:noFill/>
         </p:spPr>
         <p:txBody>
-          <a:bodyPr wrap="square" lIns="36576" rIns="36576" tIns="36576" bIns="36576" anchor="t">
+          <a:bodyPr wrap="square" lIns="36576" tIns="36576" rIns="36576" bIns="36576" anchor="t">
             <a:spAutoFit/>
           </a:bodyPr>
           <a:lstStyle/>
@@ -8046,6 +8229,7 @@
           <a:lstStyle/>
           <a:p>
             <a:pPr algn="ctr"/>
+            <a:endParaRPr/>
           </a:p>
         </p:txBody>
       </p:sp>
@@ -8089,6 +8273,7 @@
           <a:lstStyle/>
           <a:p>
             <a:pPr algn="ctr"/>
+            <a:endParaRPr/>
           </a:p>
         </p:txBody>
       </p:sp>
@@ -8109,7 +8294,7 @@
           <a:noFill/>
         </p:spPr>
         <p:txBody>
-          <a:bodyPr wrap="square" lIns="36576" rIns="36576" tIns="36576" bIns="36576" anchor="t">
+          <a:bodyPr wrap="square" lIns="36576" tIns="36576" rIns="36576" bIns="36576" anchor="t">
             <a:spAutoFit/>
           </a:bodyPr>
           <a:lstStyle/>
@@ -8148,7 +8333,7 @@
           <a:noFill/>
         </p:spPr>
         <p:txBody>
-          <a:bodyPr wrap="square" lIns="36576" rIns="36576" tIns="36576" bIns="36576" anchor="t">
+          <a:bodyPr wrap="square" lIns="36576" tIns="36576" rIns="36576" bIns="36576" anchor="t">
             <a:spAutoFit/>
           </a:bodyPr>
           <a:lstStyle/>
@@ -8187,7 +8372,7 @@
           <a:noFill/>
         </p:spPr>
         <p:txBody>
-          <a:bodyPr wrap="square" lIns="36576" rIns="36576" tIns="36576" bIns="36576" anchor="t">
+          <a:bodyPr wrap="square" lIns="36576" tIns="36576" rIns="36576" bIns="36576" anchor="t">
             <a:spAutoFit/>
           </a:bodyPr>
           <a:lstStyle/>
@@ -8249,6 +8434,7 @@
           <a:lstStyle/>
           <a:p>
             <a:pPr algn="ctr"/>
+            <a:endParaRPr/>
           </a:p>
         </p:txBody>
       </p:sp>
@@ -8269,7 +8455,7 @@
           <a:noFill/>
         </p:spPr>
         <p:txBody>
-          <a:bodyPr wrap="square" lIns="9144" rIns="9144" tIns="9144" bIns="9144" anchor="ctr">
+          <a:bodyPr wrap="square" lIns="9144" tIns="9144" rIns="9144" bIns="9144" anchor="ctr">
             <a:spAutoFit/>
           </a:bodyPr>
           <a:lstStyle/>
@@ -8308,7 +8494,7 @@
           <a:noFill/>
         </p:spPr>
         <p:txBody>
-          <a:bodyPr wrap="square" lIns="36576" rIns="36576" tIns="36576" bIns="36576" anchor="t">
+          <a:bodyPr wrap="square" lIns="36576" tIns="36576" rIns="36576" bIns="36576" anchor="t">
             <a:spAutoFit/>
           </a:bodyPr>
           <a:lstStyle/>
@@ -8347,7 +8533,7 @@
           <a:noFill/>
         </p:spPr>
         <p:txBody>
-          <a:bodyPr wrap="square" lIns="36576" rIns="36576" tIns="36576" bIns="36576" anchor="t">
+          <a:bodyPr wrap="square" lIns="36576" tIns="36576" rIns="36576" bIns="36576" anchor="t">
             <a:spAutoFit/>
           </a:bodyPr>
           <a:lstStyle/>
@@ -8409,6 +8595,7 @@
           <a:lstStyle/>
           <a:p>
             <a:pPr algn="ctr"/>
+            <a:endParaRPr/>
           </a:p>
         </p:txBody>
       </p:sp>
@@ -8429,7 +8616,7 @@
           <a:noFill/>
         </p:spPr>
         <p:txBody>
-          <a:bodyPr wrap="square" lIns="9144" rIns="9144" tIns="9144" bIns="9144" anchor="ctr">
+          <a:bodyPr wrap="square" lIns="9144" tIns="9144" rIns="9144" bIns="9144" anchor="ctr">
             <a:spAutoFit/>
           </a:bodyPr>
           <a:lstStyle/>
@@ -8468,7 +8655,7 @@
           <a:noFill/>
         </p:spPr>
         <p:txBody>
-          <a:bodyPr wrap="square" lIns="36576" rIns="36576" tIns="36576" bIns="36576" anchor="t">
+          <a:bodyPr wrap="square" lIns="36576" tIns="36576" rIns="36576" bIns="36576" anchor="t">
             <a:spAutoFit/>
           </a:bodyPr>
           <a:lstStyle/>
@@ -8507,7 +8694,7 @@
           <a:noFill/>
         </p:spPr>
         <p:txBody>
-          <a:bodyPr wrap="square" lIns="36576" rIns="36576" tIns="36576" bIns="36576" anchor="t">
+          <a:bodyPr wrap="square" lIns="36576" tIns="36576" rIns="36576" bIns="36576" anchor="t">
             <a:spAutoFit/>
           </a:bodyPr>
           <a:lstStyle/>
@@ -8569,6 +8756,7 @@
           <a:lstStyle/>
           <a:p>
             <a:pPr algn="ctr"/>
+            <a:endParaRPr/>
           </a:p>
         </p:txBody>
       </p:sp>
@@ -8589,7 +8777,7 @@
           <a:noFill/>
         </p:spPr>
         <p:txBody>
-          <a:bodyPr wrap="square" lIns="9144" rIns="9144" tIns="9144" bIns="9144" anchor="ctr">
+          <a:bodyPr wrap="square" lIns="9144" tIns="9144" rIns="9144" bIns="9144" anchor="ctr">
             <a:spAutoFit/>
           </a:bodyPr>
           <a:lstStyle/>
@@ -8628,7 +8816,7 @@
           <a:noFill/>
         </p:spPr>
         <p:txBody>
-          <a:bodyPr wrap="square" lIns="36576" rIns="36576" tIns="36576" bIns="36576" anchor="t">
+          <a:bodyPr wrap="square" lIns="36576" tIns="36576" rIns="36576" bIns="36576" anchor="t">
             <a:spAutoFit/>
           </a:bodyPr>
           <a:lstStyle/>
@@ -8667,7 +8855,7 @@
           <a:noFill/>
         </p:spPr>
         <p:txBody>
-          <a:bodyPr wrap="square" lIns="36576" rIns="36576" tIns="36576" bIns="36576" anchor="t">
+          <a:bodyPr wrap="square" lIns="36576" tIns="36576" rIns="36576" bIns="36576" anchor="t">
             <a:spAutoFit/>
           </a:bodyPr>
           <a:lstStyle/>
@@ -8698,7 +8886,7 @@
 </file>
 
 <file path=ppt/slides/slide5.xml><?xml version="1.0" encoding="utf-8"?>
-<p:sld xmlns:a="http://schemas.openxmlformats.org/drawingml/2006/main" xmlns:p="http://schemas.openxmlformats.org/presentationml/2006/main" xmlns:r="http://schemas.openxmlformats.org/officeDocument/2006/relationships">
+<p:sld xmlns:a="http://schemas.openxmlformats.org/drawingml/2006/main" xmlns:r="http://schemas.openxmlformats.org/officeDocument/2006/relationships" xmlns:p="http://schemas.openxmlformats.org/presentationml/2006/main">
   <p:cSld>
     <p:bg>
       <p:bgPr>
@@ -8714,7 +8902,14 @@
         <p:cNvGrpSpPr/>
         <p:nvPr/>
       </p:nvGrpSpPr>
-      <p:grpSpPr/>
+      <p:grpSpPr>
+        <a:xfrm>
+          <a:off x="0" y="0"/>
+          <a:ext cx="0" cy="0"/>
+          <a:chOff x="0" y="0"/>
+          <a:chExt cx="0" cy="0"/>
+        </a:xfrm>
+      </p:grpSpPr>
       <p:sp>
         <p:nvSpPr>
           <p:cNvPr id="2" name="TextBox 1"/>
@@ -8732,7 +8927,7 @@
           <a:noFill/>
         </p:spPr>
         <p:txBody>
-          <a:bodyPr wrap="square" lIns="36576" rIns="36576" tIns="36576" bIns="36576" anchor="t">
+          <a:bodyPr wrap="square" lIns="36576" tIns="36576" rIns="36576" bIns="36576" anchor="t">
             <a:spAutoFit/>
           </a:bodyPr>
           <a:lstStyle/>
@@ -8771,7 +8966,7 @@
           <a:noFill/>
         </p:spPr>
         <p:txBody>
-          <a:bodyPr wrap="square" lIns="36576" rIns="36576" tIns="36576" bIns="36576" anchor="t">
+          <a:bodyPr wrap="square" lIns="36576" tIns="36576" rIns="36576" bIns="36576" anchor="t">
             <a:spAutoFit/>
           </a:bodyPr>
           <a:lstStyle/>
@@ -8833,6 +9028,7 @@
           <a:lstStyle/>
           <a:p>
             <a:pPr algn="ctr"/>
+            <a:endParaRPr/>
           </a:p>
         </p:txBody>
       </p:sp>
@@ -8853,7 +9049,7 @@
           <a:noFill/>
         </p:spPr>
         <p:txBody>
-          <a:bodyPr wrap="square" lIns="36576" rIns="36576" tIns="36576" bIns="36576" anchor="t">
+          <a:bodyPr wrap="square" lIns="36576" tIns="36576" rIns="36576" bIns="36576" anchor="t">
             <a:spAutoFit/>
           </a:bodyPr>
           <a:lstStyle/>
@@ -8892,7 +9088,7 @@
           <a:noFill/>
         </p:spPr>
         <p:txBody>
-          <a:bodyPr wrap="square" lIns="36576" rIns="36576" tIns="36576" bIns="36576" anchor="t">
+          <a:bodyPr wrap="square" lIns="36576" tIns="36576" rIns="36576" bIns="36576" anchor="t">
             <a:spAutoFit/>
           </a:bodyPr>
           <a:lstStyle/>
@@ -8954,6 +9150,7 @@
           <a:lstStyle/>
           <a:p>
             <a:pPr algn="ctr"/>
+            <a:endParaRPr/>
           </a:p>
         </p:txBody>
       </p:sp>
@@ -8997,6 +9194,7 @@
           <a:lstStyle/>
           <a:p>
             <a:pPr algn="ctr"/>
+            <a:endParaRPr/>
           </a:p>
         </p:txBody>
       </p:sp>
@@ -9017,7 +9215,7 @@
           <a:noFill/>
         </p:spPr>
         <p:txBody>
-          <a:bodyPr wrap="square" lIns="36576" rIns="36576" tIns="36576" bIns="36576" anchor="t">
+          <a:bodyPr wrap="square" lIns="36576" tIns="36576" rIns="36576" bIns="36576" anchor="t">
             <a:spAutoFit/>
           </a:bodyPr>
           <a:lstStyle/>
@@ -9056,7 +9254,7 @@
           <a:noFill/>
         </p:spPr>
         <p:txBody>
-          <a:bodyPr wrap="square" lIns="36576" rIns="36576" tIns="36576" bIns="36576" anchor="t">
+          <a:bodyPr wrap="square" lIns="36576" tIns="36576" rIns="36576" bIns="36576" anchor="t">
             <a:spAutoFit/>
           </a:bodyPr>
           <a:lstStyle/>
@@ -9118,6 +9316,7 @@
           <a:lstStyle/>
           <a:p>
             <a:pPr algn="ctr"/>
+            <a:endParaRPr/>
           </a:p>
         </p:txBody>
       </p:sp>
@@ -9161,6 +9360,7 @@
           <a:lstStyle/>
           <a:p>
             <a:pPr algn="ctr"/>
+            <a:endParaRPr/>
           </a:p>
         </p:txBody>
       </p:sp>
@@ -9181,7 +9381,7 @@
           <a:noFill/>
         </p:spPr>
         <p:txBody>
-          <a:bodyPr wrap="square" lIns="36576" rIns="36576" tIns="36576" bIns="36576" anchor="t">
+          <a:bodyPr wrap="square" lIns="36576" tIns="36576" rIns="36576" bIns="36576" anchor="t">
             <a:spAutoFit/>
           </a:bodyPr>
           <a:lstStyle/>
@@ -9220,7 +9420,7 @@
           <a:noFill/>
         </p:spPr>
         <p:txBody>
-          <a:bodyPr wrap="square" lIns="36576" rIns="36576" tIns="36576" bIns="36576" anchor="t">
+          <a:bodyPr wrap="square" lIns="36576" tIns="36576" rIns="36576" bIns="36576" anchor="t">
             <a:spAutoFit/>
           </a:bodyPr>
           <a:lstStyle/>
@@ -9282,6 +9482,7 @@
           <a:lstStyle/>
           <a:p>
             <a:pPr algn="ctr"/>
+            <a:endParaRPr/>
           </a:p>
         </p:txBody>
       </p:sp>
@@ -9325,6 +9526,7 @@
           <a:lstStyle/>
           <a:p>
             <a:pPr algn="ctr"/>
+            <a:endParaRPr/>
           </a:p>
         </p:txBody>
       </p:sp>
@@ -9345,7 +9547,7 @@
           <a:noFill/>
         </p:spPr>
         <p:txBody>
-          <a:bodyPr wrap="square" lIns="36576" rIns="36576" tIns="36576" bIns="36576" anchor="t">
+          <a:bodyPr wrap="square" lIns="36576" tIns="36576" rIns="36576" bIns="36576" anchor="t">
             <a:spAutoFit/>
           </a:bodyPr>
           <a:lstStyle/>
@@ -9384,7 +9586,7 @@
           <a:noFill/>
         </p:spPr>
         <p:txBody>
-          <a:bodyPr wrap="square" lIns="36576" rIns="36576" tIns="36576" bIns="36576" anchor="t">
+          <a:bodyPr wrap="square" lIns="36576" tIns="36576" rIns="36576" bIns="36576" anchor="t">
             <a:spAutoFit/>
           </a:bodyPr>
           <a:lstStyle/>
@@ -9446,6 +9648,7 @@
           <a:lstStyle/>
           <a:p>
             <a:pPr algn="ctr"/>
+            <a:endParaRPr/>
           </a:p>
         </p:txBody>
       </p:sp>
@@ -9489,6 +9692,7 @@
           <a:lstStyle/>
           <a:p>
             <a:pPr algn="ctr"/>
+            <a:endParaRPr/>
           </a:p>
         </p:txBody>
       </p:sp>
@@ -9509,7 +9713,7 @@
           <a:noFill/>
         </p:spPr>
         <p:txBody>
-          <a:bodyPr wrap="square" lIns="36576" rIns="36576" tIns="36576" bIns="36576" anchor="t">
+          <a:bodyPr wrap="square" lIns="36576" tIns="36576" rIns="36576" bIns="36576" anchor="t">
             <a:spAutoFit/>
           </a:bodyPr>
           <a:lstStyle/>
@@ -9548,7 +9752,7 @@
           <a:noFill/>
         </p:spPr>
         <p:txBody>
-          <a:bodyPr wrap="square" lIns="36576" rIns="36576" tIns="36576" bIns="36576" anchor="t">
+          <a:bodyPr wrap="square" lIns="36576" tIns="36576" rIns="36576" bIns="36576" anchor="t">
             <a:spAutoFit/>
           </a:bodyPr>
           <a:lstStyle/>
@@ -9587,7 +9791,7 @@
           <a:noFill/>
         </p:spPr>
         <p:txBody>
-          <a:bodyPr wrap="square" lIns="36576" rIns="36576" tIns="36576" bIns="36576" anchor="t">
+          <a:bodyPr wrap="square" lIns="36576" tIns="36576" rIns="36576" bIns="36576" anchor="t">
             <a:spAutoFit/>
           </a:bodyPr>
           <a:lstStyle/>
@@ -9618,7 +9822,7 @@
 </file>
 
 <file path=ppt/slides/slide6.xml><?xml version="1.0" encoding="utf-8"?>
-<p:sld xmlns:a="http://schemas.openxmlformats.org/drawingml/2006/main" xmlns:p="http://schemas.openxmlformats.org/presentationml/2006/main" xmlns:r="http://schemas.openxmlformats.org/officeDocument/2006/relationships">
+<p:sld xmlns:a="http://schemas.openxmlformats.org/drawingml/2006/main" xmlns:r="http://schemas.openxmlformats.org/officeDocument/2006/relationships" xmlns:p="http://schemas.openxmlformats.org/presentationml/2006/main">
   <p:cSld>
     <p:bg>
       <p:bgPr>
@@ -9634,7 +9838,14 @@
         <p:cNvGrpSpPr/>
         <p:nvPr/>
       </p:nvGrpSpPr>
-      <p:grpSpPr/>
+      <p:grpSpPr>
+        <a:xfrm>
+          <a:off x="0" y="0"/>
+          <a:ext cx="0" cy="0"/>
+          <a:chOff x="0" y="0"/>
+          <a:chExt cx="0" cy="0"/>
+        </a:xfrm>
+      </p:grpSpPr>
       <p:sp>
         <p:nvSpPr>
           <p:cNvPr id="2" name="TextBox 1"/>
@@ -9652,7 +9863,7 @@
           <a:noFill/>
         </p:spPr>
         <p:txBody>
-          <a:bodyPr wrap="square" lIns="36576" rIns="36576" tIns="36576" bIns="36576" anchor="t">
+          <a:bodyPr wrap="square" lIns="36576" tIns="36576" rIns="36576" bIns="36576" anchor="t">
             <a:spAutoFit/>
           </a:bodyPr>
           <a:lstStyle/>
@@ -9691,7 +9902,7 @@
           <a:noFill/>
         </p:spPr>
         <p:txBody>
-          <a:bodyPr wrap="square" lIns="36576" rIns="36576" tIns="36576" bIns="36576" anchor="t">
+          <a:bodyPr wrap="square" lIns="36576" tIns="36576" rIns="36576" bIns="36576" anchor="t">
             <a:spAutoFit/>
           </a:bodyPr>
           <a:lstStyle/>
@@ -9753,6 +9964,7 @@
           <a:lstStyle/>
           <a:p>
             <a:pPr algn="ctr"/>
+            <a:endParaRPr/>
           </a:p>
         </p:txBody>
       </p:sp>
@@ -9773,7 +9985,7 @@
           <a:noFill/>
         </p:spPr>
         <p:txBody>
-          <a:bodyPr wrap="square" lIns="36576" rIns="36576" tIns="36576" bIns="36576" anchor="t">
+          <a:bodyPr wrap="square" lIns="36576" tIns="36576" rIns="36576" bIns="36576" anchor="t">
             <a:spAutoFit/>
           </a:bodyPr>
           <a:lstStyle/>
@@ -9812,7 +10024,7 @@
           <a:noFill/>
         </p:spPr>
         <p:txBody>
-          <a:bodyPr wrap="square" lIns="36576" rIns="36576" tIns="36576" bIns="36576" anchor="t">
+          <a:bodyPr wrap="square" lIns="36576" tIns="36576" rIns="36576" bIns="36576" anchor="t">
             <a:spAutoFit/>
           </a:bodyPr>
           <a:lstStyle/>
@@ -9874,6 +10086,7 @@
           <a:lstStyle/>
           <a:p>
             <a:pPr algn="ctr"/>
+            <a:endParaRPr/>
           </a:p>
         </p:txBody>
       </p:sp>
@@ -9894,7 +10107,7 @@
           <a:noFill/>
         </p:spPr>
         <p:txBody>
-          <a:bodyPr wrap="square" lIns="9144" rIns="9144" tIns="9144" bIns="9144" anchor="ctr">
+          <a:bodyPr wrap="square" lIns="9144" tIns="9144" rIns="9144" bIns="9144" anchor="ctr">
             <a:spAutoFit/>
           </a:bodyPr>
           <a:lstStyle/>
@@ -9956,6 +10169,7 @@
           <a:lstStyle/>
           <a:p>
             <a:pPr algn="ctr"/>
+            <a:endParaRPr/>
           </a:p>
         </p:txBody>
       </p:sp>
@@ -9976,7 +10190,7 @@
           <a:noFill/>
         </p:spPr>
         <p:txBody>
-          <a:bodyPr wrap="square" lIns="36576" rIns="36576" tIns="36576" bIns="36576" anchor="t">
+          <a:bodyPr wrap="square" lIns="36576" tIns="36576" rIns="36576" bIns="36576" anchor="t">
             <a:spAutoFit/>
           </a:bodyPr>
           <a:lstStyle/>
@@ -10015,7 +10229,7 @@
           <a:noFill/>
         </p:spPr>
         <p:txBody>
-          <a:bodyPr wrap="square" lIns="36576" rIns="36576" tIns="36576" bIns="36576" anchor="t">
+          <a:bodyPr wrap="square" lIns="36576" tIns="36576" rIns="36576" bIns="36576" anchor="t">
             <a:spAutoFit/>
           </a:bodyPr>
           <a:lstStyle/>
@@ -10077,6 +10291,7 @@
           <a:lstStyle/>
           <a:p>
             <a:pPr algn="ctr"/>
+            <a:endParaRPr/>
           </a:p>
         </p:txBody>
       </p:sp>
@@ -10097,7 +10312,7 @@
           <a:noFill/>
         </p:spPr>
         <p:txBody>
-          <a:bodyPr wrap="square" lIns="9144" rIns="9144" tIns="9144" bIns="9144" anchor="ctr">
+          <a:bodyPr wrap="square" lIns="9144" tIns="9144" rIns="9144" bIns="9144" anchor="ctr">
             <a:spAutoFit/>
           </a:bodyPr>
           <a:lstStyle/>
@@ -10159,6 +10374,7 @@
           <a:lstStyle/>
           <a:p>
             <a:pPr algn="ctr"/>
+            <a:endParaRPr/>
           </a:p>
         </p:txBody>
       </p:sp>
@@ -10179,7 +10395,7 @@
           <a:noFill/>
         </p:spPr>
         <p:txBody>
-          <a:bodyPr wrap="square" lIns="36576" rIns="36576" tIns="36576" bIns="36576" anchor="t">
+          <a:bodyPr wrap="square" lIns="36576" tIns="36576" rIns="36576" bIns="36576" anchor="t">
             <a:spAutoFit/>
           </a:bodyPr>
           <a:lstStyle/>
@@ -10218,7 +10434,7 @@
           <a:noFill/>
         </p:spPr>
         <p:txBody>
-          <a:bodyPr wrap="square" lIns="36576" rIns="36576" tIns="36576" bIns="36576" anchor="t">
+          <a:bodyPr wrap="square" lIns="36576" tIns="36576" rIns="36576" bIns="36576" anchor="t">
             <a:spAutoFit/>
           </a:bodyPr>
           <a:lstStyle/>
@@ -10280,6 +10496,7 @@
           <a:lstStyle/>
           <a:p>
             <a:pPr algn="ctr"/>
+            <a:endParaRPr/>
           </a:p>
         </p:txBody>
       </p:sp>
@@ -10300,7 +10517,7 @@
           <a:noFill/>
         </p:spPr>
         <p:txBody>
-          <a:bodyPr wrap="square" lIns="9144" rIns="9144" tIns="9144" bIns="9144" anchor="ctr">
+          <a:bodyPr wrap="square" lIns="9144" tIns="9144" rIns="9144" bIns="9144" anchor="ctr">
             <a:spAutoFit/>
           </a:bodyPr>
           <a:lstStyle/>
@@ -10362,6 +10579,7 @@
           <a:lstStyle/>
           <a:p>
             <a:pPr algn="ctr"/>
+            <a:endParaRPr/>
           </a:p>
         </p:txBody>
       </p:sp>
@@ -10382,7 +10600,7 @@
           <a:noFill/>
         </p:spPr>
         <p:txBody>
-          <a:bodyPr wrap="square" lIns="36576" rIns="36576" tIns="36576" bIns="36576" anchor="t">
+          <a:bodyPr wrap="square" lIns="36576" tIns="36576" rIns="36576" bIns="36576" anchor="t">
             <a:spAutoFit/>
           </a:bodyPr>
           <a:lstStyle/>
@@ -10421,7 +10639,7 @@
           <a:noFill/>
         </p:spPr>
         <p:txBody>
-          <a:bodyPr wrap="square" lIns="36576" rIns="36576" tIns="36576" bIns="36576" anchor="t">
+          <a:bodyPr wrap="square" lIns="36576" tIns="36576" rIns="36576" bIns="36576" anchor="t">
             <a:spAutoFit/>
           </a:bodyPr>
           <a:lstStyle/>
@@ -10483,6 +10701,7 @@
           <a:lstStyle/>
           <a:p>
             <a:pPr algn="ctr"/>
+            <a:endParaRPr/>
           </a:p>
         </p:txBody>
       </p:sp>
@@ -10503,7 +10722,7 @@
           <a:noFill/>
         </p:spPr>
         <p:txBody>
-          <a:bodyPr wrap="square" lIns="9144" rIns="9144" tIns="9144" bIns="9144" anchor="ctr">
+          <a:bodyPr wrap="square" lIns="9144" tIns="9144" rIns="9144" bIns="9144" anchor="ctr">
             <a:spAutoFit/>
           </a:bodyPr>
           <a:lstStyle/>
@@ -10565,6 +10784,7 @@
           <a:lstStyle/>
           <a:p>
             <a:pPr algn="ctr"/>
+            <a:endParaRPr/>
           </a:p>
         </p:txBody>
       </p:sp>
@@ -10585,7 +10805,7 @@
           <a:noFill/>
         </p:spPr>
         <p:txBody>
-          <a:bodyPr wrap="square" lIns="36576" rIns="36576" tIns="36576" bIns="36576" anchor="t">
+          <a:bodyPr wrap="square" lIns="36576" tIns="36576" rIns="36576" bIns="36576" anchor="t">
             <a:spAutoFit/>
           </a:bodyPr>
           <a:lstStyle/>
@@ -10624,7 +10844,7 @@
           <a:noFill/>
         </p:spPr>
         <p:txBody>
-          <a:bodyPr wrap="square" lIns="36576" rIns="36576" tIns="36576" bIns="36576" anchor="t">
+          <a:bodyPr wrap="square" lIns="36576" tIns="36576" rIns="36576" bIns="36576" anchor="t">
             <a:spAutoFit/>
           </a:bodyPr>
           <a:lstStyle/>
@@ -10686,6 +10906,7 @@
           <a:lstStyle/>
           <a:p>
             <a:pPr algn="ctr"/>
+            <a:endParaRPr/>
           </a:p>
         </p:txBody>
       </p:sp>
@@ -10706,7 +10927,7 @@
           <a:noFill/>
         </p:spPr>
         <p:txBody>
-          <a:bodyPr wrap="square" lIns="9144" rIns="9144" tIns="9144" bIns="9144" anchor="ctr">
+          <a:bodyPr wrap="square" lIns="9144" tIns="9144" rIns="9144" bIns="9144" anchor="ctr">
             <a:spAutoFit/>
           </a:bodyPr>
           <a:lstStyle/>
@@ -10745,7 +10966,7 @@
           <a:noFill/>
         </p:spPr>
         <p:txBody>
-          <a:bodyPr wrap="square" lIns="36576" rIns="36576" tIns="36576" bIns="36576" anchor="t">
+          <a:bodyPr wrap="square" lIns="36576" tIns="36576" rIns="36576" bIns="36576" anchor="t">
             <a:spAutoFit/>
           </a:bodyPr>
           <a:lstStyle/>
@@ -10784,7 +11005,7 @@
           <a:noFill/>
         </p:spPr>
         <p:txBody>
-          <a:bodyPr wrap="square" lIns="36576" rIns="36576" tIns="36576" bIns="36576" anchor="t">
+          <a:bodyPr wrap="square" lIns="36576" tIns="36576" rIns="36576" bIns="36576" anchor="t">
             <a:spAutoFit/>
           </a:bodyPr>
           <a:lstStyle/>
@@ -10846,6 +11067,7 @@
           <a:lstStyle/>
           <a:p>
             <a:pPr algn="ctr"/>
+            <a:endParaRPr/>
           </a:p>
         </p:txBody>
       </p:sp>
@@ -10866,7 +11088,7 @@
           <a:noFill/>
         </p:spPr>
         <p:txBody>
-          <a:bodyPr wrap="square" lIns="36576" rIns="36576" tIns="36576" bIns="36576" anchor="t">
+          <a:bodyPr wrap="square" lIns="36576" tIns="36576" rIns="36576" bIns="36576" anchor="t">
             <a:spAutoFit/>
           </a:bodyPr>
           <a:lstStyle/>
@@ -10897,7 +11119,7 @@
 </file>
 
 <file path=ppt/slides/slide7.xml><?xml version="1.0" encoding="utf-8"?>
-<p:sld xmlns:a="http://schemas.openxmlformats.org/drawingml/2006/main" xmlns:p="http://schemas.openxmlformats.org/presentationml/2006/main" xmlns:r="http://schemas.openxmlformats.org/officeDocument/2006/relationships">
+<p:sld xmlns:a="http://schemas.openxmlformats.org/drawingml/2006/main" xmlns:r="http://schemas.openxmlformats.org/officeDocument/2006/relationships" xmlns:p="http://schemas.openxmlformats.org/presentationml/2006/main">
   <p:cSld>
     <p:bg>
       <p:bgPr>
@@ -10913,7 +11135,14 @@
         <p:cNvGrpSpPr/>
         <p:nvPr/>
       </p:nvGrpSpPr>
-      <p:grpSpPr/>
+      <p:grpSpPr>
+        <a:xfrm>
+          <a:off x="0" y="0"/>
+          <a:ext cx="0" cy="0"/>
+          <a:chOff x="0" y="0"/>
+          <a:chExt cx="0" cy="0"/>
+        </a:xfrm>
+      </p:grpSpPr>
       <p:sp>
         <p:nvSpPr>
           <p:cNvPr id="2" name="TextBox 1"/>
@@ -10931,7 +11160,7 @@
           <a:noFill/>
         </p:spPr>
         <p:txBody>
-          <a:bodyPr wrap="square" lIns="36576" rIns="36576" tIns="36576" bIns="36576" anchor="t">
+          <a:bodyPr wrap="square" lIns="36576" tIns="36576" rIns="36576" bIns="36576" anchor="t">
             <a:spAutoFit/>
           </a:bodyPr>
           <a:lstStyle/>
@@ -10970,7 +11199,7 @@
           <a:noFill/>
         </p:spPr>
         <p:txBody>
-          <a:bodyPr wrap="square" lIns="36576" rIns="36576" tIns="36576" bIns="36576" anchor="t">
+          <a:bodyPr wrap="square" lIns="36576" tIns="36576" rIns="36576" bIns="36576" anchor="t">
             <a:spAutoFit/>
           </a:bodyPr>
           <a:lstStyle/>
@@ -11032,6 +11261,7 @@
           <a:lstStyle/>
           <a:p>
             <a:pPr algn="ctr"/>
+            <a:endParaRPr/>
           </a:p>
         </p:txBody>
       </p:sp>
@@ -11052,7 +11282,7 @@
           <a:noFill/>
         </p:spPr>
         <p:txBody>
-          <a:bodyPr wrap="square" lIns="36576" rIns="36576" tIns="36576" bIns="36576" anchor="t">
+          <a:bodyPr wrap="square" lIns="36576" tIns="36576" rIns="36576" bIns="36576" anchor="t">
             <a:spAutoFit/>
           </a:bodyPr>
           <a:lstStyle/>
@@ -11091,7 +11321,7 @@
           <a:noFill/>
         </p:spPr>
         <p:txBody>
-          <a:bodyPr wrap="square" lIns="36576" rIns="36576" tIns="36576" bIns="36576" anchor="t">
+          <a:bodyPr wrap="square" lIns="36576" tIns="36576" rIns="36576" bIns="36576" anchor="t">
             <a:spAutoFit/>
           </a:bodyPr>
           <a:lstStyle/>
@@ -11153,6 +11383,7 @@
           <a:lstStyle/>
           <a:p>
             <a:pPr algn="ctr"/>
+            <a:endParaRPr/>
           </a:p>
         </p:txBody>
       </p:sp>
@@ -11196,6 +11427,7 @@
           <a:lstStyle/>
           <a:p>
             <a:pPr algn="ctr"/>
+            <a:endParaRPr/>
           </a:p>
         </p:txBody>
       </p:sp>
@@ -11216,7 +11448,7 @@
           <a:noFill/>
         </p:spPr>
         <p:txBody>
-          <a:bodyPr wrap="square" lIns="36576" rIns="36576" tIns="36576" bIns="36576" anchor="t">
+          <a:bodyPr wrap="square" lIns="36576" tIns="36576" rIns="36576" bIns="36576" anchor="t">
             <a:spAutoFit/>
           </a:bodyPr>
           <a:lstStyle/>
@@ -11255,7 +11487,7 @@
           <a:noFill/>
         </p:spPr>
         <p:txBody>
-          <a:bodyPr wrap="square" lIns="36576" rIns="36576" tIns="36576" bIns="36576" anchor="t">
+          <a:bodyPr wrap="square" lIns="36576" tIns="36576" rIns="36576" bIns="36576" anchor="t">
             <a:spAutoFit/>
           </a:bodyPr>
           <a:lstStyle/>
@@ -11313,6 +11545,12 @@
                 <a:spcPts val="700"/>
               </a:spcAft>
             </a:pPr>
+            <a:endParaRPr sz="1500" b="0">
+              <a:solidFill>
+                <a:srgbClr val="ABBAD3"/>
+              </a:solidFill>
+              <a:latin typeface="Aptos"/>
+            </a:endParaRPr>
           </a:p>
           <a:p>
             <a:pPr algn="l">
@@ -11372,6 +11610,7 @@
           <a:lstStyle/>
           <a:p>
             <a:pPr algn="ctr"/>
+            <a:endParaRPr/>
           </a:p>
         </p:txBody>
       </p:sp>
@@ -11415,6 +11654,7 @@
           <a:lstStyle/>
           <a:p>
             <a:pPr algn="ctr"/>
+            <a:endParaRPr/>
           </a:p>
         </p:txBody>
       </p:sp>
@@ -11435,7 +11675,7 @@
           <a:noFill/>
         </p:spPr>
         <p:txBody>
-          <a:bodyPr wrap="square" lIns="36576" rIns="36576" tIns="36576" bIns="36576" anchor="t">
+          <a:bodyPr wrap="square" lIns="36576" tIns="36576" rIns="36576" bIns="36576" anchor="t">
             <a:spAutoFit/>
           </a:bodyPr>
           <a:lstStyle/>
@@ -11474,7 +11714,7 @@
           <a:noFill/>
         </p:spPr>
         <p:txBody>
-          <a:bodyPr wrap="square" lIns="36576" rIns="36576" tIns="36576" bIns="36576" anchor="t">
+          <a:bodyPr wrap="square" lIns="36576" tIns="36576" rIns="36576" bIns="36576" anchor="t">
             <a:spAutoFit/>
           </a:bodyPr>
           <a:lstStyle/>
@@ -11500,6 +11740,12 @@
                 <a:spcPts val="700"/>
               </a:spcAft>
             </a:pPr>
+            <a:endParaRPr sz="1600" b="0">
+              <a:solidFill>
+                <a:srgbClr val="ABBAD3"/>
+              </a:solidFill>
+              <a:latin typeface="Aptos"/>
+            </a:endParaRPr>
           </a:p>
           <a:p>
             <a:pPr algn="l">
@@ -11536,7 +11782,7 @@
           <a:noFill/>
         </p:spPr>
         <p:txBody>
-          <a:bodyPr wrap="square" lIns="36576" rIns="36576" tIns="36576" bIns="36576" anchor="t">
+          <a:bodyPr wrap="square" lIns="36576" tIns="36576" rIns="36576" bIns="36576" anchor="t">
             <a:spAutoFit/>
           </a:bodyPr>
           <a:lstStyle/>
@@ -11567,7 +11813,7 @@
 </file>
 
 <file path=ppt/slides/slide8.xml><?xml version="1.0" encoding="utf-8"?>
-<p:sld xmlns:a="http://schemas.openxmlformats.org/drawingml/2006/main" xmlns:p="http://schemas.openxmlformats.org/presentationml/2006/main" xmlns:r="http://schemas.openxmlformats.org/officeDocument/2006/relationships">
+<p:sld xmlns:a="http://schemas.openxmlformats.org/drawingml/2006/main" xmlns:r="http://schemas.openxmlformats.org/officeDocument/2006/relationships" xmlns:p="http://schemas.openxmlformats.org/presentationml/2006/main">
   <p:cSld>
     <p:bg>
       <p:bgPr>
@@ -11583,7 +11829,14 @@
         <p:cNvGrpSpPr/>
         <p:nvPr/>
       </p:nvGrpSpPr>
-      <p:grpSpPr/>
+      <p:grpSpPr>
+        <a:xfrm>
+          <a:off x="0" y="0"/>
+          <a:ext cx="0" cy="0"/>
+          <a:chOff x="0" y="0"/>
+          <a:chExt cx="0" cy="0"/>
+        </a:xfrm>
+      </p:grpSpPr>
       <p:sp>
         <p:nvSpPr>
           <p:cNvPr id="2" name="TextBox 1"/>
@@ -11601,7 +11854,7 @@
           <a:noFill/>
         </p:spPr>
         <p:txBody>
-          <a:bodyPr wrap="square" lIns="36576" rIns="36576" tIns="36576" bIns="36576" anchor="t">
+          <a:bodyPr wrap="square" lIns="36576" tIns="36576" rIns="36576" bIns="36576" anchor="t">
             <a:spAutoFit/>
           </a:bodyPr>
           <a:lstStyle/>
@@ -11640,7 +11893,7 @@
           <a:noFill/>
         </p:spPr>
         <p:txBody>
-          <a:bodyPr wrap="square" lIns="36576" rIns="36576" tIns="36576" bIns="36576" anchor="t">
+          <a:bodyPr wrap="square" lIns="36576" tIns="36576" rIns="36576" bIns="36576" anchor="t">
             <a:spAutoFit/>
           </a:bodyPr>
           <a:lstStyle/>
@@ -11702,6 +11955,7 @@
           <a:lstStyle/>
           <a:p>
             <a:pPr algn="ctr"/>
+            <a:endParaRPr/>
           </a:p>
         </p:txBody>
       </p:sp>
@@ -11722,7 +11976,7 @@
           <a:noFill/>
         </p:spPr>
         <p:txBody>
-          <a:bodyPr wrap="square" lIns="36576" rIns="36576" tIns="36576" bIns="36576" anchor="t">
+          <a:bodyPr wrap="square" lIns="36576" tIns="36576" rIns="36576" bIns="36576" anchor="t">
             <a:spAutoFit/>
           </a:bodyPr>
           <a:lstStyle/>
@@ -11761,7 +12015,7 @@
           <a:noFill/>
         </p:spPr>
         <p:txBody>
-          <a:bodyPr wrap="square" lIns="36576" rIns="36576" tIns="36576" bIns="36576" anchor="t">
+          <a:bodyPr wrap="square" lIns="36576" tIns="36576" rIns="36576" bIns="36576" anchor="t">
             <a:spAutoFit/>
           </a:bodyPr>
           <a:lstStyle/>
@@ -11823,6 +12077,7 @@
           <a:lstStyle/>
           <a:p>
             <a:pPr algn="ctr"/>
+            <a:endParaRPr/>
           </a:p>
         </p:txBody>
       </p:sp>
@@ -11843,7 +12098,7 @@
           <a:noFill/>
         </p:spPr>
         <p:txBody>
-          <a:bodyPr wrap="square" lIns="36576" rIns="36576" tIns="36576" bIns="36576" anchor="t">
+          <a:bodyPr wrap="square" lIns="36576" tIns="36576" rIns="36576" bIns="36576" anchor="t">
             <a:spAutoFit/>
           </a:bodyPr>
           <a:lstStyle/>
@@ -11882,7 +12137,7 @@
           <a:noFill/>
         </p:spPr>
         <p:txBody>
-          <a:bodyPr wrap="square" lIns="45720" rIns="45720" tIns="27432" bIns="27432">
+          <a:bodyPr wrap="square" lIns="45720" tIns="27432" rIns="45720" bIns="27432">
             <a:spAutoFit/>
           </a:bodyPr>
           <a:lstStyle/>
@@ -12053,6 +12308,7 @@
           <a:lstStyle/>
           <a:p>
             <a:pPr algn="ctr"/>
+            <a:endParaRPr/>
           </a:p>
         </p:txBody>
       </p:sp>
@@ -12073,7 +12329,7 @@
           <a:noFill/>
         </p:spPr>
         <p:txBody>
-          <a:bodyPr wrap="square" lIns="36576" rIns="36576" tIns="36576" bIns="36576" anchor="t">
+          <a:bodyPr wrap="square" lIns="36576" tIns="36576" rIns="36576" bIns="36576" anchor="t">
             <a:spAutoFit/>
           </a:bodyPr>
           <a:lstStyle/>
@@ -12112,7 +12368,7 @@
           <a:noFill/>
         </p:spPr>
         <p:txBody>
-          <a:bodyPr wrap="square" lIns="45720" rIns="45720" tIns="27432" bIns="27432">
+          <a:bodyPr wrap="square" lIns="45720" tIns="27432" rIns="45720" bIns="27432">
             <a:spAutoFit/>
           </a:bodyPr>
           <a:lstStyle/>
@@ -12227,7 +12483,7 @@
 </file>
 
 <file path=ppt/slides/slide9.xml><?xml version="1.0" encoding="utf-8"?>
-<p:sld xmlns:a="http://schemas.openxmlformats.org/drawingml/2006/main" xmlns:p="http://schemas.openxmlformats.org/presentationml/2006/main" xmlns:r="http://schemas.openxmlformats.org/officeDocument/2006/relationships">
+<p:sld xmlns:a="http://schemas.openxmlformats.org/drawingml/2006/main" xmlns:r="http://schemas.openxmlformats.org/officeDocument/2006/relationships" xmlns:p="http://schemas.openxmlformats.org/presentationml/2006/main">
   <p:cSld>
     <p:bg>
       <p:bgPr>
@@ -12243,7 +12499,14 @@
         <p:cNvGrpSpPr/>
         <p:nvPr/>
       </p:nvGrpSpPr>
-      <p:grpSpPr/>
+      <p:grpSpPr>
+        <a:xfrm>
+          <a:off x="0" y="0"/>
+          <a:ext cx="0" cy="0"/>
+          <a:chOff x="0" y="0"/>
+          <a:chExt cx="0" cy="0"/>
+        </a:xfrm>
+      </p:grpSpPr>
       <p:sp>
         <p:nvSpPr>
           <p:cNvPr id="2" name="TextBox 1"/>
@@ -12261,7 +12524,7 @@
           <a:noFill/>
         </p:spPr>
         <p:txBody>
-          <a:bodyPr wrap="square" lIns="36576" rIns="36576" tIns="36576" bIns="36576" anchor="t">
+          <a:bodyPr wrap="square" lIns="36576" tIns="36576" rIns="36576" bIns="36576" anchor="t">
             <a:spAutoFit/>
           </a:bodyPr>
           <a:lstStyle/>
@@ -12300,7 +12563,7 @@
           <a:noFill/>
         </p:spPr>
         <p:txBody>
-          <a:bodyPr wrap="square" lIns="36576" rIns="36576" tIns="36576" bIns="36576" anchor="t">
+          <a:bodyPr wrap="square" lIns="36576" tIns="36576" rIns="36576" bIns="36576" anchor="t">
             <a:spAutoFit/>
           </a:bodyPr>
           <a:lstStyle/>
@@ -12362,6 +12625,7 @@
           <a:lstStyle/>
           <a:p>
             <a:pPr algn="ctr"/>
+            <a:endParaRPr/>
           </a:p>
         </p:txBody>
       </p:sp>
@@ -12382,7 +12646,7 @@
           <a:noFill/>
         </p:spPr>
         <p:txBody>
-          <a:bodyPr wrap="square" lIns="36576" rIns="36576" tIns="36576" bIns="36576" anchor="t">
+          <a:bodyPr wrap="square" lIns="36576" tIns="36576" rIns="36576" bIns="36576" anchor="t">
             <a:spAutoFit/>
           </a:bodyPr>
           <a:lstStyle/>
@@ -12421,7 +12685,7 @@
           <a:noFill/>
         </p:spPr>
         <p:txBody>
-          <a:bodyPr wrap="square" lIns="36576" rIns="36576" tIns="36576" bIns="36576" anchor="t">
+          <a:bodyPr wrap="square" lIns="36576" tIns="36576" rIns="36576" bIns="36576" anchor="t">
             <a:spAutoFit/>
           </a:bodyPr>
           <a:lstStyle/>
@@ -12483,6 +12747,7 @@
           <a:lstStyle/>
           <a:p>
             <a:pPr algn="ctr"/>
+            <a:endParaRPr/>
           </a:p>
         </p:txBody>
       </p:sp>
@@ -12526,6 +12791,7 @@
           <a:lstStyle/>
           <a:p>
             <a:pPr algn="ctr"/>
+            <a:endParaRPr/>
           </a:p>
         </p:txBody>
       </p:sp>
@@ -12546,7 +12812,7 @@
           <a:noFill/>
         </p:spPr>
         <p:txBody>
-          <a:bodyPr wrap="square" lIns="9144" rIns="9144" tIns="9144" bIns="9144" anchor="ctr">
+          <a:bodyPr wrap="square" lIns="9144" tIns="9144" rIns="9144" bIns="9144" anchor="ctr">
             <a:spAutoFit/>
           </a:bodyPr>
           <a:lstStyle/>
@@ -12585,7 +12851,7 @@
           <a:noFill/>
         </p:spPr>
         <p:txBody>
-          <a:bodyPr wrap="square" lIns="36576" rIns="36576" tIns="36576" bIns="36576" anchor="t">
+          <a:bodyPr wrap="square" lIns="36576" tIns="36576" rIns="36576" bIns="36576" anchor="t">
             <a:spAutoFit/>
           </a:bodyPr>
           <a:lstStyle/>
@@ -12624,7 +12890,7 @@
           <a:noFill/>
         </p:spPr>
         <p:txBody>
-          <a:bodyPr wrap="square" lIns="36576" rIns="36576" tIns="36576" bIns="36576" anchor="t">
+          <a:bodyPr wrap="square" lIns="36576" tIns="36576" rIns="36576" bIns="36576" anchor="t">
             <a:spAutoFit/>
           </a:bodyPr>
           <a:lstStyle/>
@@ -12702,6 +12968,7 @@
           <a:lstStyle/>
           <a:p>
             <a:pPr algn="ctr"/>
+            <a:endParaRPr/>
           </a:p>
         </p:txBody>
       </p:sp>
@@ -12745,6 +13012,7 @@
           <a:lstStyle/>
           <a:p>
             <a:pPr algn="ctr"/>
+            <a:endParaRPr/>
           </a:p>
         </p:txBody>
       </p:sp>
@@ -12765,7 +13033,7 @@
           <a:noFill/>
         </p:spPr>
         <p:txBody>
-          <a:bodyPr wrap="square" lIns="9144" rIns="9144" tIns="9144" bIns="9144" anchor="ctr">
+          <a:bodyPr wrap="square" lIns="9144" tIns="9144" rIns="9144" bIns="9144" anchor="ctr">
             <a:spAutoFit/>
           </a:bodyPr>
           <a:lstStyle/>
@@ -12804,7 +13072,7 @@
           <a:noFill/>
         </p:spPr>
         <p:txBody>
-          <a:bodyPr wrap="square" lIns="36576" rIns="36576" tIns="36576" bIns="36576" anchor="t">
+          <a:bodyPr wrap="square" lIns="36576" tIns="36576" rIns="36576" bIns="36576" anchor="t">
             <a:spAutoFit/>
           </a:bodyPr>
           <a:lstStyle/>
@@ -12843,7 +13111,7 @@
           <a:noFill/>
         </p:spPr>
         <p:txBody>
-          <a:bodyPr wrap="square" lIns="36576" rIns="36576" tIns="36576" bIns="36576" anchor="t">
+          <a:bodyPr wrap="square" lIns="36576" tIns="36576" rIns="36576" bIns="36576" anchor="t">
             <a:spAutoFit/>
           </a:bodyPr>
           <a:lstStyle/>
@@ -12921,6 +13189,7 @@
           <a:lstStyle/>
           <a:p>
             <a:pPr algn="ctr"/>
+            <a:endParaRPr/>
           </a:p>
         </p:txBody>
       </p:sp>
@@ -12964,6 +13233,7 @@
           <a:lstStyle/>
           <a:p>
             <a:pPr algn="ctr"/>
+            <a:endParaRPr/>
           </a:p>
         </p:txBody>
       </p:sp>
@@ -12984,7 +13254,7 @@
           <a:noFill/>
         </p:spPr>
         <p:txBody>
-          <a:bodyPr wrap="square" lIns="9144" rIns="9144" tIns="9144" bIns="9144" anchor="ctr">
+          <a:bodyPr wrap="square" lIns="9144" tIns="9144" rIns="9144" bIns="9144" anchor="ctr">
             <a:spAutoFit/>
           </a:bodyPr>
           <a:lstStyle/>
@@ -13023,7 +13293,7 @@
           <a:noFill/>
         </p:spPr>
         <p:txBody>
-          <a:bodyPr wrap="square" lIns="36576" rIns="36576" tIns="36576" bIns="36576" anchor="t">
+          <a:bodyPr wrap="square" lIns="36576" tIns="36576" rIns="36576" bIns="36576" anchor="t">
             <a:spAutoFit/>
           </a:bodyPr>
           <a:lstStyle/>
@@ -13062,7 +13332,7 @@
           <a:noFill/>
         </p:spPr>
         <p:txBody>
-          <a:bodyPr wrap="square" lIns="36576" rIns="36576" tIns="36576" bIns="36576" anchor="t">
+          <a:bodyPr wrap="square" lIns="36576" tIns="36576" rIns="36576" bIns="36576" anchor="t">
             <a:spAutoFit/>
           </a:bodyPr>
           <a:lstStyle/>
@@ -13140,6 +13410,7 @@
           <a:lstStyle/>
           <a:p>
             <a:pPr algn="ctr"/>
+            <a:endParaRPr/>
           </a:p>
         </p:txBody>
       </p:sp>
@@ -13183,6 +13454,7 @@
           <a:lstStyle/>
           <a:p>
             <a:pPr algn="ctr"/>
+            <a:endParaRPr/>
           </a:p>
         </p:txBody>
       </p:sp>
@@ -13203,7 +13475,7 @@
           <a:noFill/>
         </p:spPr>
         <p:txBody>
-          <a:bodyPr wrap="square" lIns="36576" rIns="36576" tIns="36576" bIns="36576" anchor="t">
+          <a:bodyPr wrap="square" lIns="36576" tIns="36576" rIns="36576" bIns="36576" anchor="t">
             <a:spAutoFit/>
           </a:bodyPr>
           <a:lstStyle/>
@@ -13242,7 +13514,7 @@
           <a:noFill/>
         </p:spPr>
         <p:txBody>
-          <a:bodyPr wrap="square" lIns="36576" rIns="36576" tIns="36576" bIns="36576" anchor="t">
+          <a:bodyPr wrap="square" lIns="36576" tIns="36576" rIns="36576" bIns="36576" anchor="t">
             <a:spAutoFit/>
           </a:bodyPr>
           <a:lstStyle/>
@@ -13304,6 +13576,7 @@
           <a:lstStyle/>
           <a:p>
             <a:pPr algn="ctr"/>
+            <a:endParaRPr/>
           </a:p>
         </p:txBody>
       </p:sp>
@@ -13324,7 +13597,7 @@
           <a:noFill/>
         </p:spPr>
         <p:txBody>
-          <a:bodyPr wrap="square" lIns="36576" rIns="36576" tIns="36576" bIns="36576" anchor="t">
+          <a:bodyPr wrap="square" lIns="36576" tIns="36576" rIns="36576" bIns="36576" anchor="t">
             <a:spAutoFit/>
           </a:bodyPr>
           <a:lstStyle/>
